--- a/20260930_サンクスLINEのご提案（簡易版）ver1.0.pptx
+++ b/20260930_サンクスLINEのご提案（簡易版）ver1.0.pptx
@@ -3111,7 +3111,7 @@
         </p:nvSpPr>
         <p:spPr>
           <a:xfrm>
-            <a:off x="432000" y="2015999"/>
+            <a:off x="432000" y="2323800"/>
             <a:ext cx="1872000" cy="1080000"/>
           </a:xfrm>
           <a:prstGeom prst="roundRect">
@@ -3174,7 +3174,7 @@
         </p:nvSpPr>
         <p:spPr>
           <a:xfrm>
-            <a:off x="2412000" y="2394000"/>
+            <a:off x="2412000" y="2701801"/>
             <a:ext cx="324000" cy="324000"/>
           </a:xfrm>
           <a:prstGeom prst="rightArrow">
@@ -3218,7 +3218,7 @@
         </p:nvSpPr>
         <p:spPr>
           <a:xfrm>
-            <a:off x="2844000" y="2015999"/>
+            <a:off x="2844000" y="2323800"/>
             <a:ext cx="1872000" cy="1080000"/>
           </a:xfrm>
           <a:prstGeom prst="roundRect">
@@ -3299,7 +3299,7 @@
         </p:nvSpPr>
         <p:spPr>
           <a:xfrm>
-            <a:off x="4824000" y="2394000"/>
+            <a:off x="4824000" y="2701801"/>
             <a:ext cx="324000" cy="324000"/>
           </a:xfrm>
           <a:prstGeom prst="rightArrow">
@@ -3343,7 +3343,7 @@
         </p:nvSpPr>
         <p:spPr>
           <a:xfrm>
-            <a:off x="5256000" y="2015999"/>
+            <a:off x="5256000" y="2323800"/>
             <a:ext cx="1872000" cy="1080000"/>
           </a:xfrm>
           <a:prstGeom prst="roundRect">
@@ -3425,7 +3425,7 @@
         </p:nvSpPr>
         <p:spPr>
           <a:xfrm>
-            <a:off x="7236000" y="2394000"/>
+            <a:off x="7236000" y="2701801"/>
             <a:ext cx="324000" cy="324000"/>
           </a:xfrm>
           <a:prstGeom prst="rightArrow">
@@ -3469,7 +3469,7 @@
         </p:nvSpPr>
         <p:spPr>
           <a:xfrm>
-            <a:off x="7668000" y="2015999"/>
+            <a:off x="7668000" y="2323800"/>
             <a:ext cx="1807199" cy="1080000"/>
           </a:xfrm>
           <a:prstGeom prst="roundRect">
@@ -3548,7 +3548,7 @@
         </p:nvSpPr>
         <p:spPr>
           <a:xfrm>
-            <a:off x="5256000" y="3240000"/>
+            <a:off x="5256000" y="3547801"/>
             <a:ext cx="4219200" cy="540000"/>
           </a:xfrm>
           <a:prstGeom prst="roundRect">
@@ -3605,7 +3605,7 @@
         </p:nvSpPr>
         <p:spPr>
           <a:xfrm>
-            <a:off x="432000" y="3240000"/>
+            <a:off x="432000" y="3547801"/>
             <a:ext cx="4644000" cy="540000"/>
           </a:xfrm>
           <a:prstGeom prst="rect">
@@ -3642,7 +3642,7 @@
         </p:nvSpPr>
         <p:spPr>
           <a:xfrm>
-            <a:off x="432000" y="4536000"/>
+            <a:off x="432000" y="4843801"/>
             <a:ext cx="9043200" cy="503999"/>
           </a:xfrm>
           <a:prstGeom prst="roundRect">
@@ -3852,7 +3852,7 @@
         </p:nvSpPr>
         <p:spPr>
           <a:xfrm>
-            <a:off x="432000" y="1655999"/>
+            <a:off x="432000" y="2485800"/>
             <a:ext cx="1584000" cy="936000"/>
           </a:xfrm>
           <a:prstGeom prst="roundRect">
@@ -3915,7 +3915,7 @@
         </p:nvSpPr>
         <p:spPr>
           <a:xfrm>
-            <a:off x="2088000" y="1961999"/>
+            <a:off x="2088000" y="2791800"/>
             <a:ext cx="288000" cy="324000"/>
           </a:xfrm>
           <a:prstGeom prst="rightArrow">
@@ -3959,7 +3959,7 @@
         </p:nvSpPr>
         <p:spPr>
           <a:xfrm>
-            <a:off x="2448000" y="1655999"/>
+            <a:off x="2448000" y="2485800"/>
             <a:ext cx="1764000" cy="936000"/>
           </a:xfrm>
           <a:prstGeom prst="roundRect">
@@ -4040,7 +4040,7 @@
         </p:nvSpPr>
         <p:spPr>
           <a:xfrm>
-            <a:off x="4284000" y="1961999"/>
+            <a:off x="4284000" y="2791800"/>
             <a:ext cx="288000" cy="324000"/>
           </a:xfrm>
           <a:prstGeom prst="rightArrow">
@@ -4084,7 +4084,7 @@
         </p:nvSpPr>
         <p:spPr>
           <a:xfrm>
-            <a:off x="4644000" y="1655999"/>
+            <a:off x="4644000" y="2485800"/>
             <a:ext cx="1296000" cy="936000"/>
           </a:xfrm>
           <a:prstGeom prst="roundRect">
@@ -4181,7 +4181,7 @@
         </p:nvSpPr>
         <p:spPr>
           <a:xfrm>
-            <a:off x="6012000" y="1961999"/>
+            <a:off x="6012000" y="2791800"/>
             <a:ext cx="288000" cy="324000"/>
           </a:xfrm>
           <a:prstGeom prst="rightArrow">
@@ -4225,7 +4225,7 @@
         </p:nvSpPr>
         <p:spPr>
           <a:xfrm>
-            <a:off x="6372000" y="1655999"/>
+            <a:off x="6372000" y="2485800"/>
             <a:ext cx="3103199" cy="432000"/>
           </a:xfrm>
           <a:prstGeom prst="roundRect">
@@ -4288,7 +4288,7 @@
         </p:nvSpPr>
         <p:spPr>
           <a:xfrm>
-            <a:off x="6372000" y="2160000"/>
+            <a:off x="6372000" y="2989801"/>
             <a:ext cx="3103199" cy="432000"/>
           </a:xfrm>
           <a:prstGeom prst="roundRect">
@@ -4351,7 +4351,7 @@
         </p:nvSpPr>
         <p:spPr>
           <a:xfrm>
-            <a:off x="432000" y="2880000"/>
+            <a:off x="432000" y="3709801"/>
             <a:ext cx="2951999" cy="936000"/>
           </a:xfrm>
           <a:prstGeom prst="roundRect">
@@ -4433,7 +4433,7 @@
         </p:nvSpPr>
         <p:spPr>
           <a:xfrm>
-            <a:off x="3477599" y="2880000"/>
+            <a:off x="3477599" y="3709801"/>
             <a:ext cx="2951999" cy="936000"/>
           </a:xfrm>
           <a:prstGeom prst="roundRect">
@@ -4515,7 +4515,7 @@
         </p:nvSpPr>
         <p:spPr>
           <a:xfrm>
-            <a:off x="6523199" y="2880000"/>
+            <a:off x="6523199" y="3709801"/>
             <a:ext cx="2951999" cy="936000"/>
           </a:xfrm>
           <a:prstGeom prst="roundRect">
@@ -4597,7 +4597,7 @@
         </p:nvSpPr>
         <p:spPr>
           <a:xfrm>
-            <a:off x="432000" y="4031999"/>
+            <a:off x="432000" y="4861800"/>
             <a:ext cx="1655999" cy="324000"/>
           </a:xfrm>
           <a:prstGeom prst="roundRect">
@@ -4654,7 +4654,7 @@
         </p:nvSpPr>
         <p:spPr>
           <a:xfrm>
-            <a:off x="2160000" y="4031999"/>
+            <a:off x="2160000" y="4861800"/>
             <a:ext cx="1655999" cy="324000"/>
           </a:xfrm>
           <a:prstGeom prst="roundRect">
@@ -4711,7 +4711,7 @@
         </p:nvSpPr>
         <p:spPr>
           <a:xfrm>
-            <a:off x="3960000" y="4031999"/>
+            <a:off x="3960000" y="4861800"/>
             <a:ext cx="5508000" cy="324000"/>
           </a:xfrm>
           <a:prstGeom prst="rect">
@@ -4891,7 +4891,7 @@
         </p:nvSpPr>
         <p:spPr>
           <a:xfrm>
-            <a:off x="432000" y="1655999"/>
+            <a:off x="432000" y="2215800"/>
             <a:ext cx="2951999" cy="503999"/>
           </a:xfrm>
           <a:prstGeom prst="roundRect">
@@ -4952,7 +4952,7 @@
         </p:nvSpPr>
         <p:spPr>
           <a:xfrm>
-            <a:off x="1692000" y="2214000"/>
+            <a:off x="1692000" y="2773801"/>
             <a:ext cx="432000" cy="251999"/>
           </a:xfrm>
           <a:prstGeom prst="downArrow">
@@ -4996,7 +4996,7 @@
         </p:nvSpPr>
         <p:spPr>
           <a:xfrm>
-            <a:off x="432000" y="2520000"/>
+            <a:off x="432000" y="3079801"/>
             <a:ext cx="2951999" cy="648000"/>
           </a:xfrm>
           <a:prstGeom prst="roundRect">
@@ -5059,7 +5059,7 @@
         </p:nvSpPr>
         <p:spPr>
           <a:xfrm>
-            <a:off x="1692000" y="3221999"/>
+            <a:off x="1692000" y="3781800"/>
             <a:ext cx="432000" cy="251999"/>
           </a:xfrm>
           <a:prstGeom prst="downArrow">
@@ -5103,7 +5103,7 @@
         </p:nvSpPr>
         <p:spPr>
           <a:xfrm>
-            <a:off x="432000" y="3528000"/>
+            <a:off x="432000" y="4087801"/>
             <a:ext cx="2951999" cy="503999"/>
           </a:xfrm>
           <a:prstGeom prst="roundRect">
@@ -5164,7 +5164,7 @@
         </p:nvSpPr>
         <p:spPr>
           <a:xfrm>
-            <a:off x="3477599" y="1655999"/>
+            <a:off x="3477599" y="2215800"/>
             <a:ext cx="2951999" cy="503999"/>
           </a:xfrm>
           <a:prstGeom prst="roundRect">
@@ -5225,7 +5225,7 @@
         </p:nvSpPr>
         <p:spPr>
           <a:xfrm>
-            <a:off x="4737599" y="2214000"/>
+            <a:off x="4737599" y="2773801"/>
             <a:ext cx="432000" cy="251999"/>
           </a:xfrm>
           <a:prstGeom prst="downArrow">
@@ -5269,7 +5269,7 @@
         </p:nvSpPr>
         <p:spPr>
           <a:xfrm>
-            <a:off x="3477599" y="2520000"/>
+            <a:off x="3477599" y="3079801"/>
             <a:ext cx="2951999" cy="648000"/>
           </a:xfrm>
           <a:prstGeom prst="roundRect">
@@ -5332,7 +5332,7 @@
         </p:nvSpPr>
         <p:spPr>
           <a:xfrm>
-            <a:off x="4737599" y="3221999"/>
+            <a:off x="4737599" y="3781800"/>
             <a:ext cx="432000" cy="251999"/>
           </a:xfrm>
           <a:prstGeom prst="downArrow">
@@ -5376,7 +5376,7 @@
         </p:nvSpPr>
         <p:spPr>
           <a:xfrm>
-            <a:off x="3477599" y="3528000"/>
+            <a:off x="3477599" y="4087801"/>
             <a:ext cx="2951999" cy="503999"/>
           </a:xfrm>
           <a:prstGeom prst="roundRect">
@@ -5437,7 +5437,7 @@
         </p:nvSpPr>
         <p:spPr>
           <a:xfrm>
-            <a:off x="6523199" y="1655999"/>
+            <a:off x="6523199" y="2215800"/>
             <a:ext cx="2951999" cy="503999"/>
           </a:xfrm>
           <a:prstGeom prst="roundRect">
@@ -5498,7 +5498,7 @@
         </p:nvSpPr>
         <p:spPr>
           <a:xfrm>
-            <a:off x="7783199" y="2214000"/>
+            <a:off x="7783199" y="2773801"/>
             <a:ext cx="432000" cy="251999"/>
           </a:xfrm>
           <a:prstGeom prst="downArrow">
@@ -5542,7 +5542,7 @@
         </p:nvSpPr>
         <p:spPr>
           <a:xfrm>
-            <a:off x="6523199" y="2520000"/>
+            <a:off x="6523199" y="3079801"/>
             <a:ext cx="2951999" cy="648000"/>
           </a:xfrm>
           <a:prstGeom prst="roundRect">
@@ -5605,7 +5605,7 @@
         </p:nvSpPr>
         <p:spPr>
           <a:xfrm>
-            <a:off x="7783199" y="3221999"/>
+            <a:off x="7783199" y="3781800"/>
             <a:ext cx="432000" cy="251999"/>
           </a:xfrm>
           <a:prstGeom prst="downArrow">
@@ -5649,7 +5649,7 @@
         </p:nvSpPr>
         <p:spPr>
           <a:xfrm>
-            <a:off x="6523199" y="3528000"/>
+            <a:off x="6523199" y="4087801"/>
             <a:ext cx="2951999" cy="503999"/>
           </a:xfrm>
           <a:prstGeom prst="roundRect">
@@ -5710,7 +5710,7 @@
         </p:nvSpPr>
         <p:spPr>
           <a:xfrm>
-            <a:off x="432000" y="4392000"/>
+            <a:off x="432000" y="4951801"/>
             <a:ext cx="9043200" cy="503999"/>
           </a:xfrm>
           <a:prstGeom prst="roundRect">
@@ -5914,7 +5914,7 @@
         </p:nvSpPr>
         <p:spPr>
           <a:xfrm>
-            <a:off x="1584000" y="1584000"/>
+            <a:off x="1584000" y="2287800"/>
             <a:ext cx="3204000" cy="270000"/>
           </a:xfrm>
           <a:prstGeom prst="roundRect">
@@ -5971,7 +5971,7 @@
         </p:nvSpPr>
         <p:spPr>
           <a:xfrm>
-            <a:off x="4896000" y="1584000"/>
+            <a:off x="4896000" y="2287800"/>
             <a:ext cx="4579200" cy="270000"/>
           </a:xfrm>
           <a:prstGeom prst="roundRect">
@@ -6028,7 +6028,7 @@
         </p:nvSpPr>
         <p:spPr>
           <a:xfrm>
-            <a:off x="432000" y="1980000"/>
+            <a:off x="432000" y="2683800"/>
             <a:ext cx="1044000" cy="864000"/>
           </a:xfrm>
           <a:prstGeom prst="roundRect">
@@ -6089,7 +6089,7 @@
         </p:nvSpPr>
         <p:spPr>
           <a:xfrm>
-            <a:off x="1584000" y="1980000"/>
+            <a:off x="1584000" y="2683800"/>
             <a:ext cx="3204000" cy="864000"/>
           </a:xfrm>
           <a:prstGeom prst="roundRect">
@@ -6170,7 +6170,7 @@
         </p:nvSpPr>
         <p:spPr>
           <a:xfrm>
-            <a:off x="4860000" y="2250000"/>
+            <a:off x="4860000" y="2953800"/>
             <a:ext cx="288000" cy="324000"/>
           </a:xfrm>
           <a:prstGeom prst="rightArrow">
@@ -6214,7 +6214,7 @@
         </p:nvSpPr>
         <p:spPr>
           <a:xfrm>
-            <a:off x="5220000" y="1980000"/>
+            <a:off x="5220000" y="2683800"/>
             <a:ext cx="1944000" cy="864000"/>
           </a:xfrm>
           <a:prstGeom prst="roundRect">
@@ -6278,7 +6278,7 @@
         </p:nvSpPr>
         <p:spPr>
           <a:xfrm>
-            <a:off x="7236000" y="2250000"/>
+            <a:off x="7236000" y="2953800"/>
             <a:ext cx="288000" cy="324000"/>
           </a:xfrm>
           <a:prstGeom prst="rightArrow">
@@ -6322,7 +6322,7 @@
         </p:nvSpPr>
         <p:spPr>
           <a:xfrm>
-            <a:off x="7596000" y="1980000"/>
+            <a:off x="7596000" y="2683800"/>
             <a:ext cx="1879200" cy="864000"/>
           </a:xfrm>
           <a:prstGeom prst="roundRect">
@@ -6401,7 +6401,7 @@
         </p:nvSpPr>
         <p:spPr>
           <a:xfrm>
-            <a:off x="432000" y="3024000"/>
+            <a:off x="432000" y="3727800"/>
             <a:ext cx="1044000" cy="864000"/>
           </a:xfrm>
           <a:prstGeom prst="roundRect">
@@ -6480,7 +6480,7 @@
         </p:nvSpPr>
         <p:spPr>
           <a:xfrm>
-            <a:off x="1584000" y="3024000"/>
+            <a:off x="1584000" y="3727800"/>
             <a:ext cx="3204000" cy="864000"/>
           </a:xfrm>
           <a:prstGeom prst="roundRect">
@@ -6561,7 +6561,7 @@
         </p:nvSpPr>
         <p:spPr>
           <a:xfrm>
-            <a:off x="4860000" y="3294000"/>
+            <a:off x="4860000" y="3997800"/>
             <a:ext cx="288000" cy="324000"/>
           </a:xfrm>
           <a:prstGeom prst="rightArrow">
@@ -6605,7 +6605,7 @@
         </p:nvSpPr>
         <p:spPr>
           <a:xfrm>
-            <a:off x="5220000" y="3024000"/>
+            <a:off x="5220000" y="3727800"/>
             <a:ext cx="1944000" cy="864000"/>
           </a:xfrm>
           <a:prstGeom prst="roundRect">
@@ -6668,7 +6668,7 @@
         </p:nvSpPr>
         <p:spPr>
           <a:xfrm>
-            <a:off x="7236000" y="3294000"/>
+            <a:off x="7236000" y="3997800"/>
             <a:ext cx="288000" cy="324000"/>
           </a:xfrm>
           <a:prstGeom prst="rightArrow">
@@ -6712,7 +6712,7 @@
         </p:nvSpPr>
         <p:spPr>
           <a:xfrm>
-            <a:off x="7596000" y="3024000"/>
+            <a:off x="7596000" y="3727800"/>
             <a:ext cx="1879200" cy="864000"/>
           </a:xfrm>
           <a:prstGeom prst="roundRect">
@@ -6791,7 +6791,7 @@
         </p:nvSpPr>
         <p:spPr>
           <a:xfrm>
-            <a:off x="432000" y="4176000"/>
+            <a:off x="432000" y="4879800"/>
             <a:ext cx="9043200" cy="503999"/>
           </a:xfrm>
           <a:prstGeom prst="roundRect">
@@ -7037,7 +7037,7 @@
         </p:nvSpPr>
         <p:spPr>
           <a:xfrm>
-            <a:off x="432000" y="1728000"/>
+            <a:off x="432000" y="2143800"/>
             <a:ext cx="864000" cy="864000"/>
           </a:xfrm>
           <a:prstGeom prst="roundRect">
@@ -7098,7 +7098,7 @@
         </p:nvSpPr>
         <p:spPr>
           <a:xfrm>
-            <a:off x="1404000" y="1728000"/>
+            <a:off x="1404000" y="2143800"/>
             <a:ext cx="8071200" cy="864000"/>
           </a:xfrm>
           <a:prstGeom prst="roundRect">
@@ -7180,7 +7180,7 @@
         </p:nvSpPr>
         <p:spPr>
           <a:xfrm>
-            <a:off x="432000" y="2808000"/>
+            <a:off x="432000" y="3223800"/>
             <a:ext cx="864000" cy="864000"/>
           </a:xfrm>
           <a:prstGeom prst="roundRect">
@@ -7241,7 +7241,7 @@
         </p:nvSpPr>
         <p:spPr>
           <a:xfrm>
-            <a:off x="1404000" y="2808000"/>
+            <a:off x="1404000" y="3223800"/>
             <a:ext cx="8071200" cy="864000"/>
           </a:xfrm>
           <a:prstGeom prst="roundRect">
@@ -7323,7 +7323,7 @@
         </p:nvSpPr>
         <p:spPr>
           <a:xfrm>
-            <a:off x="432000" y="3996000"/>
+            <a:off x="432000" y="4411800"/>
             <a:ext cx="1655999" cy="324000"/>
           </a:xfrm>
           <a:prstGeom prst="roundRect">
@@ -7380,7 +7380,7 @@
         </p:nvSpPr>
         <p:spPr>
           <a:xfrm>
-            <a:off x="2160000" y="3996000"/>
+            <a:off x="2160000" y="4411800"/>
             <a:ext cx="1655999" cy="324000"/>
           </a:xfrm>
           <a:prstGeom prst="roundRect">
@@ -7437,7 +7437,7 @@
         </p:nvSpPr>
         <p:spPr>
           <a:xfrm>
-            <a:off x="3960000" y="3996000"/>
+            <a:off x="3960000" y="4411800"/>
             <a:ext cx="5508000" cy="324000"/>
           </a:xfrm>
           <a:prstGeom prst="rect">
@@ -7474,7 +7474,7 @@
         </p:nvSpPr>
         <p:spPr>
           <a:xfrm>
-            <a:off x="432000" y="4608000"/>
+            <a:off x="432000" y="5023800"/>
             <a:ext cx="9043200" cy="503999"/>
           </a:xfrm>
           <a:prstGeom prst="roundRect">

--- a/20260930_サンクスLINEのご提案（簡易版）ver1.0.pptx
+++ b/20260930_サンクスLINEのご提案（簡易版）ver1.0.pptx
@@ -6,17 +6,17 @@
     <p:sldMasterId id="2147483687" r:id="rId2"/>
   </p:sldMasterIdLst>
   <p:notesMasterIdLst>
-    <p:notesMasterId r:id="rId27"/>
+    <p:notesMasterId r:id="rId8"/>
   </p:notesMasterIdLst>
   <p:handoutMasterIdLst>
-    <p:handoutMasterId r:id="rId28"/>
+    <p:handoutMasterId r:id="rId9"/>
   </p:handoutMasterIdLst>
   <p:sldIdLst>
-    <p:sldId id="2971" r:id="rId4"/>
-    <p:sldId id="2972" r:id="rId5"/>
-    <p:sldId id="2904" r:id="rId6"/>
-    <p:sldId id="3007" r:id="rId7"/>
-    <p:sldId id="2987" r:id="rId8"/>
+    <p:sldId id="2971" r:id="rId3"/>
+    <p:sldId id="2972" r:id="rId4"/>
+    <p:sldId id="2904" r:id="rId5"/>
+    <p:sldId id="3007" r:id="rId6"/>
+    <p:sldId id="2987" r:id="rId7"/>
   </p:sldIdLst>
   <p:sldSz cx="9906000" cy="6858000" type="A4"/>
   <p:notesSz cx="6807200" cy="9939338"/>
@@ -706,7 +706,7 @@
           <a:p>
             <a:fld id="{022E43C0-6795-4B13-B37C-259C826D4B6A}" type="slidenum">
               <a:rPr kumimoji="1" lang="ja-JP" altLang="en-US" smtClean="0"/>
-              <a:t>2</a:t>
+              <a:t>1</a:t>
             </a:fld>
             <a:endParaRPr kumimoji="1" lang="ja-JP" altLang="en-US"/>
           </a:p>
@@ -814,7 +814,7 @@
           <a:p>
             <a:fld id="{022E43C0-6795-4B13-B37C-259C826D4B6A}" type="slidenum">
               <a:rPr kumimoji="1" lang="ja-JP" altLang="en-US" smtClean="0"/>
-              <a:t>3</a:t>
+              <a:t>2</a:t>
             </a:fld>
             <a:endParaRPr kumimoji="1" lang="ja-JP" altLang="en-US"/>
           </a:p>
@@ -922,7 +922,7 @@
           <a:p>
             <a:fld id="{022E43C0-6795-4B13-B37C-259C826D4B6A}" type="slidenum">
               <a:rPr kumimoji="1" lang="ja-JP" altLang="en-US" smtClean="0"/>
-              <a:t>6</a:t>
+              <a:t>5</a:t>
             </a:fld>
             <a:endParaRPr kumimoji="1" lang="ja-JP" altLang="en-US"/>
           </a:p>
@@ -2967,7 +2967,7 @@
 </p:sldMaster>
 </file>
 
-<file path=ppt/slides/slide2.xml><?xml version="1.0" encoding="utf-8"?>
+<file path=ppt/slides/slide1.xml><?xml version="1.0" encoding="utf-8"?>
 <p:sld xmlns:a="http://schemas.openxmlformats.org/drawingml/2006/main" xmlns:r="http://schemas.openxmlformats.org/officeDocument/2006/relationships" xmlns:p="http://schemas.openxmlformats.org/presentationml/2006/main">
   <p:cSld>
     <p:spTree>
@@ -2998,8 +2998,8 @@
         </p:nvSpPr>
         <p:spPr>
           <a:xfrm>
-            <a:off x="547200" y="136800"/>
-            <a:ext cx="8784000" cy="338400"/>
+            <a:off x="547200" y="161078"/>
+            <a:ext cx="8784000" cy="289843"/>
           </a:xfrm>
           <a:prstGeom prst="rect">
             <a:avLst/>
@@ -3007,14 +3007,14 @@
           <a:noFill/>
         </p:spPr>
         <p:txBody>
-          <a:bodyPr wrap="square" lIns="0" rIns="0" tIns="21600" bIns="21600" anchor="ctr">
+          <a:bodyPr wrap="square" lIns="0" tIns="21600" rIns="0" bIns="21600" anchor="ctr">
             <a:spAutoFit/>
           </a:bodyPr>
           <a:lstStyle/>
           <a:p>
             <a:pPr algn="l"/>
             <a:r>
-              <a:rPr sz="1600" b="1">
+              <a:rPr sz="1600" b="1" dirty="0">
                 <a:solidFill>
                   <a:srgbClr val="002060"/>
                 </a:solidFill>
@@ -3022,8 +3022,60 @@
                 <a:ea typeface="メイリオ"/>
                 <a:cs typeface="メイリオ"/>
               </a:rPr>
-              <a:t>LINEの成果は、申込みの「後」で決まる</a:t>
-            </a:r>
+              <a:t>LINE</a:t>
+            </a:r>
+            <a:r>
+              <a:rPr lang="ja-JP" altLang="en-US" sz="1600" b="1" dirty="0">
+                <a:solidFill>
+                  <a:srgbClr val="002060"/>
+                </a:solidFill>
+                <a:latin typeface="メイリオ"/>
+                <a:ea typeface="メイリオ"/>
+                <a:cs typeface="メイリオ"/>
+              </a:rPr>
+              <a:t>の</a:t>
+            </a:r>
+            <a:r>
+              <a:rPr sz="1600" b="1" dirty="0" err="1">
+                <a:solidFill>
+                  <a:srgbClr val="002060"/>
+                </a:solidFill>
+                <a:latin typeface="メイリオ"/>
+                <a:ea typeface="メイリオ"/>
+                <a:cs typeface="メイリオ"/>
+              </a:rPr>
+              <a:t>は、申込みの「後</a:t>
+            </a:r>
+            <a:r>
+              <a:rPr sz="1600" b="1" dirty="0">
+                <a:solidFill>
+                  <a:srgbClr val="002060"/>
+                </a:solidFill>
+                <a:latin typeface="メイリオ"/>
+                <a:ea typeface="メイリオ"/>
+                <a:cs typeface="メイリオ"/>
+              </a:rPr>
+              <a:t>」</a:t>
+            </a:r>
+            <a:r>
+              <a:rPr lang="ja-JP" altLang="en-US" sz="1600" b="1" dirty="0">
+                <a:solidFill>
+                  <a:srgbClr val="002060"/>
+                </a:solidFill>
+                <a:latin typeface="メイリオ"/>
+                <a:ea typeface="メイリオ"/>
+                <a:cs typeface="メイリオ"/>
+              </a:rPr>
+              <a:t>につながる</a:t>
+            </a:r>
+            <a:endParaRPr sz="1600" b="1" dirty="0">
+              <a:solidFill>
+                <a:srgbClr val="002060"/>
+              </a:solidFill>
+              <a:latin typeface="メイリオ"/>
+              <a:ea typeface="メイリオ"/>
+              <a:cs typeface="メイリオ"/>
+            </a:endParaRPr>
           </a:p>
         </p:txBody>
       </p:sp>
@@ -3035,8 +3087,8 @@
         </p:nvSpPr>
         <p:spPr>
           <a:xfrm>
-            <a:off x="432000" y="648000"/>
-            <a:ext cx="9036000" cy="684000"/>
+            <a:off x="432000" y="836230"/>
+            <a:ext cx="9036000" cy="307540"/>
           </a:xfrm>
           <a:prstGeom prst="rect">
             <a:avLst/>
@@ -3044,7 +3096,7 @@
           <a:noFill/>
         </p:spPr>
         <p:txBody>
-          <a:bodyPr wrap="square" lIns="0" rIns="0" tIns="21600" bIns="21600" anchor="ctr">
+          <a:bodyPr wrap="square" lIns="0" tIns="21600" rIns="0" bIns="21600" anchor="ctr">
             <a:spAutoFit/>
           </a:bodyPr>
           <a:lstStyle/>
@@ -3055,7 +3107,7 @@
               </a:lnSpc>
             </a:pPr>
             <a:r>
-              <a:rPr sz="1250">
+              <a:rPr lang="en-US" altLang="ja-JP" sz="1400" dirty="0">
                 <a:solidFill>
                   <a:srgbClr val="333333"/>
                 </a:solidFill>
@@ -3063,8 +3115,49 @@
                 <a:ea typeface="メイリオ"/>
                 <a:cs typeface="メイリオ"/>
               </a:rPr>
-              <a:t>広告で申込みまではとれても、来店・成約・リピートは、その後の追い方次第です。</a:t>
-            </a:r>
+              <a:t>LINE</a:t>
+            </a:r>
+            <a:r>
+              <a:rPr lang="ja-JP" altLang="en-US" sz="1400" dirty="0">
+                <a:solidFill>
+                  <a:srgbClr val="333333"/>
+                </a:solidFill>
+                <a:latin typeface="メイリオ"/>
+                <a:ea typeface="メイリオ"/>
+                <a:cs typeface="メイリオ"/>
+              </a:rPr>
+              <a:t>で、</a:t>
+            </a:r>
+            <a:r>
+              <a:rPr sz="1400" dirty="0" err="1">
+                <a:solidFill>
+                  <a:srgbClr val="333333"/>
+                </a:solidFill>
+                <a:latin typeface="メイリオ"/>
+                <a:ea typeface="メイリオ"/>
+                <a:cs typeface="メイリオ"/>
+              </a:rPr>
+              <a:t>来店・成約・リピート</a:t>
+            </a:r>
+            <a:r>
+              <a:rPr lang="ja-JP" altLang="en-US" sz="1400" dirty="0">
+                <a:solidFill>
+                  <a:srgbClr val="333333"/>
+                </a:solidFill>
+                <a:latin typeface="メイリオ"/>
+                <a:ea typeface="メイリオ"/>
+                <a:cs typeface="メイリオ"/>
+              </a:rPr>
+              <a:t>まで追う</a:t>
+            </a:r>
+            <a:endParaRPr sz="1400" dirty="0">
+              <a:solidFill>
+                <a:srgbClr val="333333"/>
+              </a:solidFill>
+              <a:latin typeface="メイリオ"/>
+              <a:ea typeface="メイリオ"/>
+              <a:cs typeface="メイリオ"/>
+            </a:endParaRPr>
           </a:p>
         </p:txBody>
       </p:sp>
@@ -3144,7 +3237,7 @@
           </a:fontRef>
         </p:style>
         <p:txBody>
-          <a:bodyPr rtlCol="0" anchor="ctr" wrap="square" lIns="54000" rIns="54000" tIns="18000" bIns="18000"/>
+          <a:bodyPr wrap="square" lIns="54000" tIns="18000" rIns="54000" bIns="18000" rtlCol="0" anchor="ctr"/>
           <a:lstStyle/>
           <a:p>
             <a:pPr algn="ctr">
@@ -3207,6 +3300,7 @@
           <a:lstStyle/>
           <a:p>
             <a:pPr algn="ctr"/>
+            <a:endParaRPr/>
           </a:p>
         </p:txBody>
       </p:sp>
@@ -3251,7 +3345,7 @@
           </a:fontRef>
         </p:style>
         <p:txBody>
-          <a:bodyPr rtlCol="0" anchor="ctr" wrap="square" lIns="54000" rIns="54000" tIns="18000" bIns="18000"/>
+          <a:bodyPr wrap="square" lIns="54000" tIns="18000" rIns="54000" bIns="18000" rtlCol="0" anchor="ctr"/>
           <a:lstStyle/>
           <a:p>
             <a:pPr algn="ctr">
@@ -3332,6 +3426,7 @@
           <a:lstStyle/>
           <a:p>
             <a:pPr algn="ctr"/>
+            <a:endParaRPr/>
           </a:p>
         </p:txBody>
       </p:sp>
@@ -3377,7 +3472,7 @@
           </a:fontRef>
         </p:style>
         <p:txBody>
-          <a:bodyPr rtlCol="0" anchor="ctr" wrap="square" lIns="54000" rIns="54000" tIns="18000" bIns="18000"/>
+          <a:bodyPr wrap="square" lIns="54000" tIns="18000" rIns="54000" bIns="18000" rtlCol="0" anchor="ctr"/>
           <a:lstStyle/>
           <a:p>
             <a:pPr algn="ctr">
@@ -3458,6 +3553,7 @@
           <a:lstStyle/>
           <a:p>
             <a:pPr algn="ctr"/>
+            <a:endParaRPr/>
           </a:p>
         </p:txBody>
       </p:sp>
@@ -3500,7 +3596,7 @@
           </a:fontRef>
         </p:style>
         <p:txBody>
-          <a:bodyPr rtlCol="0" anchor="ctr" wrap="square" lIns="54000" rIns="54000" tIns="18000" bIns="18000"/>
+          <a:bodyPr wrap="square" lIns="54000" tIns="18000" rIns="54000" bIns="18000" rtlCol="0" anchor="ctr"/>
           <a:lstStyle/>
           <a:p>
             <a:pPr algn="ctr">
@@ -3579,7 +3675,7 @@
           </a:fontRef>
         </p:style>
         <p:txBody>
-          <a:bodyPr rtlCol="0" anchor="ctr" wrap="square" lIns="50400" rIns="50400" tIns="21600" bIns="21600"/>
+          <a:bodyPr wrap="square" lIns="50400" tIns="21600" rIns="50400" bIns="21600" rtlCol="0" anchor="ctr"/>
           <a:lstStyle/>
           <a:p>
             <a:pPr algn="ctr"/>
@@ -3614,7 +3710,7 @@
           <a:noFill/>
         </p:spPr>
         <p:txBody>
-          <a:bodyPr wrap="square" lIns="50400" rIns="50400" tIns="21600" bIns="21600" anchor="ctr">
+          <a:bodyPr wrap="square" lIns="50400" tIns="21600" rIns="50400" bIns="21600" anchor="ctr">
             <a:spAutoFit/>
           </a:bodyPr>
           <a:lstStyle/>
@@ -3673,7 +3769,7 @@
           </a:fontRef>
         </p:style>
         <p:txBody>
-          <a:bodyPr rtlCol="0" anchor="ctr" wrap="square" lIns="108000" rIns="108000" tIns="0" bIns="0"/>
+          <a:bodyPr wrap="square" lIns="108000" tIns="0" rIns="108000" bIns="0" rtlCol="0" anchor="ctr"/>
           <a:lstStyle/>
           <a:p>
             <a:pPr algn="ctr">
@@ -3708,7 +3804,7 @@
 </p:sld>
 </file>
 
-<file path=ppt/slides/slide3.xml><?xml version="1.0" encoding="utf-8"?>
+<file path=ppt/slides/slide2.xml><?xml version="1.0" encoding="utf-8"?>
 <p:sld xmlns:a="http://schemas.openxmlformats.org/drawingml/2006/main" xmlns:r="http://schemas.openxmlformats.org/officeDocument/2006/relationships" xmlns:p="http://schemas.openxmlformats.org/presentationml/2006/main">
   <p:cSld>
     <p:spTree>
@@ -3748,7 +3844,7 @@
           <a:noFill/>
         </p:spPr>
         <p:txBody>
-          <a:bodyPr wrap="square" lIns="0" rIns="0" tIns="21600" bIns="21600" anchor="ctr">
+          <a:bodyPr wrap="square" lIns="0" tIns="21600" rIns="0" bIns="21600" anchor="ctr">
             <a:spAutoFit/>
           </a:bodyPr>
           <a:lstStyle/>
@@ -3776,8 +3872,8 @@
         </p:nvSpPr>
         <p:spPr>
           <a:xfrm>
-            <a:off x="432000" y="648000"/>
-            <a:ext cx="9036000" cy="684000"/>
+            <a:off x="432000" y="696191"/>
+            <a:ext cx="9036000" cy="587617"/>
           </a:xfrm>
           <a:prstGeom prst="rect">
             <a:avLst/>
@@ -3785,7 +3881,7 @@
           <a:noFill/>
         </p:spPr>
         <p:txBody>
-          <a:bodyPr wrap="square" lIns="0" rIns="0" tIns="21600" bIns="21600" anchor="ctr">
+          <a:bodyPr wrap="square" lIns="0" tIns="21600" rIns="0" bIns="21600" anchor="ctr">
             <a:spAutoFit/>
           </a:bodyPr>
           <a:lstStyle/>
@@ -3796,7 +3892,7 @@
               </a:lnSpc>
             </a:pPr>
             <a:r>
-              <a:rPr sz="1250">
+              <a:rPr sz="1400" dirty="0" err="1">
                 <a:solidFill>
                   <a:srgbClr val="333333"/>
                 </a:solidFill>
@@ -3804,8 +3900,86 @@
                 <a:ea typeface="メイリオ"/>
                 <a:cs typeface="メイリオ"/>
               </a:rPr>
-              <a:t>申込みの完了画面から、そのままLINEへ。関心が一番高いタイミングなので、友だちになっていただきやすい仕組みです。</a:t>
-            </a:r>
+              <a:t>申込みの完了画面から、そのままLINEへ</a:t>
+            </a:r>
+            <a:r>
+              <a:rPr sz="1400" dirty="0">
+                <a:solidFill>
+                  <a:srgbClr val="333333"/>
+                </a:solidFill>
+                <a:latin typeface="メイリオ"/>
+                <a:ea typeface="メイリオ"/>
+                <a:cs typeface="メイリオ"/>
+              </a:rPr>
+              <a:t>。</a:t>
+            </a:r>
+            <a:endParaRPr lang="en-US" sz="1400" dirty="0">
+              <a:solidFill>
+                <a:srgbClr val="333333"/>
+              </a:solidFill>
+              <a:latin typeface="メイリオ"/>
+              <a:ea typeface="メイリオ"/>
+              <a:cs typeface="メイリオ"/>
+            </a:endParaRPr>
+          </a:p>
+          <a:p>
+            <a:pPr algn="l">
+              <a:lnSpc>
+                <a:spcPct val="130000"/>
+              </a:lnSpc>
+            </a:pPr>
+            <a:r>
+              <a:rPr sz="1400" dirty="0" err="1">
+                <a:solidFill>
+                  <a:srgbClr val="333333"/>
+                </a:solidFill>
+                <a:latin typeface="メイリオ"/>
+                <a:ea typeface="メイリオ"/>
+                <a:cs typeface="メイリオ"/>
+              </a:rPr>
+              <a:t>関心が一番高いタイミング</a:t>
+            </a:r>
+            <a:r>
+              <a:rPr lang="ja-JP" altLang="en-US" sz="1400" dirty="0">
+                <a:solidFill>
+                  <a:srgbClr val="333333"/>
+                </a:solidFill>
+                <a:latin typeface="メイリオ"/>
+                <a:ea typeface="メイリオ"/>
+                <a:cs typeface="メイリオ"/>
+              </a:rPr>
+              <a:t>＝</a:t>
+            </a:r>
+            <a:r>
+              <a:rPr sz="1400" dirty="0" err="1">
+                <a:solidFill>
+                  <a:srgbClr val="333333"/>
+                </a:solidFill>
+                <a:latin typeface="メイリオ"/>
+                <a:ea typeface="メイリオ"/>
+                <a:cs typeface="メイリオ"/>
+              </a:rPr>
+              <a:t>友だちに</a:t>
+            </a:r>
+            <a:r>
+              <a:rPr lang="ja-JP" altLang="en-US" sz="1400" dirty="0">
+                <a:solidFill>
+                  <a:srgbClr val="333333"/>
+                </a:solidFill>
+                <a:latin typeface="メイリオ"/>
+                <a:ea typeface="メイリオ"/>
+                <a:cs typeface="メイリオ"/>
+              </a:rPr>
+              <a:t>なりやすい</a:t>
+            </a:r>
+            <a:endParaRPr sz="1400" dirty="0">
+              <a:solidFill>
+                <a:srgbClr val="333333"/>
+              </a:solidFill>
+              <a:latin typeface="メイリオ"/>
+              <a:ea typeface="メイリオ"/>
+              <a:cs typeface="メイリオ"/>
+            </a:endParaRPr>
           </a:p>
         </p:txBody>
       </p:sp>
@@ -3885,7 +4059,7 @@
           </a:fontRef>
         </p:style>
         <p:txBody>
-          <a:bodyPr rtlCol="0" anchor="ctr" wrap="square" lIns="54000" rIns="54000" tIns="18000" bIns="18000"/>
+          <a:bodyPr wrap="square" lIns="54000" tIns="18000" rIns="54000" bIns="18000" rtlCol="0" anchor="ctr"/>
           <a:lstStyle/>
           <a:p>
             <a:pPr algn="ctr">
@@ -3948,6 +4122,7 @@
           <a:lstStyle/>
           <a:p>
             <a:pPr algn="ctr"/>
+            <a:endParaRPr/>
           </a:p>
         </p:txBody>
       </p:sp>
@@ -3992,7 +4167,7 @@
           </a:fontRef>
         </p:style>
         <p:txBody>
-          <a:bodyPr rtlCol="0" anchor="ctr" wrap="square" lIns="54000" rIns="54000" tIns="18000" bIns="18000"/>
+          <a:bodyPr wrap="square" lIns="54000" tIns="18000" rIns="54000" bIns="18000" rtlCol="0" anchor="ctr"/>
           <a:lstStyle/>
           <a:p>
             <a:pPr algn="ctr">
@@ -4073,6 +4248,7 @@
           <a:lstStyle/>
           <a:p>
             <a:pPr algn="ctr"/>
+            <a:endParaRPr/>
           </a:p>
         </p:txBody>
       </p:sp>
@@ -4115,7 +4291,7 @@
           </a:fontRef>
         </p:style>
         <p:txBody>
-          <a:bodyPr rtlCol="0" anchor="ctr" wrap="square" lIns="54000" rIns="54000" tIns="18000" bIns="18000"/>
+          <a:bodyPr wrap="square" lIns="54000" tIns="18000" rIns="54000" bIns="18000" rtlCol="0" anchor="ctr"/>
           <a:lstStyle/>
           <a:p>
             <a:pPr algn="ctr">
@@ -4124,7 +4300,7 @@
               </a:lnSpc>
             </a:pPr>
             <a:r>
-              <a:rPr sz="1300" b="1">
+              <a:rPr sz="1200" b="0" dirty="0" err="1">
                 <a:solidFill>
                   <a:srgbClr val="FFFFFF"/>
                 </a:solidFill>
@@ -4132,8 +4308,16 @@
                 <a:ea typeface="メイリオ"/>
                 <a:cs typeface="メイリオ"/>
               </a:rPr>
-              <a:t>DYMの</a:t>
-            </a:r>
+              <a:t>ツールで</a:t>
+            </a:r>
+            <a:endParaRPr sz="1200" b="0" dirty="0">
+              <a:solidFill>
+                <a:srgbClr val="FFFFFF"/>
+              </a:solidFill>
+              <a:latin typeface="メイリオ"/>
+              <a:ea typeface="メイリオ"/>
+              <a:cs typeface="メイリオ"/>
+            </a:endParaRPr>
           </a:p>
           <a:p>
             <a:pPr algn="ctr">
@@ -4142,7 +4326,7 @@
               </a:lnSpc>
             </a:pPr>
             <a:r>
-              <a:rPr sz="1100" b="0">
+              <a:rPr sz="1200" b="0" dirty="0" err="1">
                 <a:solidFill>
                   <a:srgbClr val="FFFFFF"/>
                 </a:solidFill>
@@ -4150,26 +4334,16 @@
                 <a:ea typeface="メイリオ"/>
                 <a:cs typeface="メイリオ"/>
               </a:rPr>
-              <a:t>ツールで</a:t>
-            </a:r>
-          </a:p>
-          <a:p>
-            <a:pPr algn="ctr">
-              <a:lnSpc>
-                <a:spcPct val="120000"/>
-              </a:lnSpc>
-            </a:pPr>
-            <a:r>
-              <a:rPr sz="1100" b="0">
-                <a:solidFill>
-                  <a:srgbClr val="FFFFFF"/>
-                </a:solidFill>
-                <a:latin typeface="メイリオ"/>
-                <a:ea typeface="メイリオ"/>
-                <a:cs typeface="メイリオ"/>
-              </a:rPr>
               <a:t>LINEへ</a:t>
             </a:r>
+            <a:endParaRPr sz="1200" b="0" dirty="0">
+              <a:solidFill>
+                <a:srgbClr val="FFFFFF"/>
+              </a:solidFill>
+              <a:latin typeface="メイリオ"/>
+              <a:ea typeface="メイリオ"/>
+              <a:cs typeface="メイリオ"/>
+            </a:endParaRPr>
           </a:p>
         </p:txBody>
       </p:sp>
@@ -4214,6 +4388,7 @@
           <a:lstStyle/>
           <a:p>
             <a:pPr algn="ctr"/>
+            <a:endParaRPr/>
           </a:p>
         </p:txBody>
       </p:sp>
@@ -4258,7 +4433,7 @@
           </a:fontRef>
         </p:style>
         <p:txBody>
-          <a:bodyPr rtlCol="0" anchor="ctr" wrap="square" lIns="54000" rIns="54000" tIns="18000" bIns="18000"/>
+          <a:bodyPr wrap="square" lIns="54000" tIns="18000" rIns="54000" bIns="18000" rtlCol="0" anchor="ctr"/>
           <a:lstStyle/>
           <a:p>
             <a:pPr algn="ctr">
@@ -4321,7 +4496,7 @@
           </a:fontRef>
         </p:style>
         <p:txBody>
-          <a:bodyPr rtlCol="0" anchor="ctr" wrap="square" lIns="54000" rIns="54000" tIns="18000" bIns="18000"/>
+          <a:bodyPr wrap="square" lIns="54000" tIns="18000" rIns="54000" bIns="18000" rtlCol="0" anchor="ctr"/>
           <a:lstStyle/>
           <a:p>
             <a:pPr algn="ctr">
@@ -4382,7 +4557,7 @@
           </a:fontRef>
         </p:style>
         <p:txBody>
-          <a:bodyPr rtlCol="0" anchor="ctr" wrap="square" lIns="125999" rIns="108000" tIns="90000" bIns="54000"/>
+          <a:bodyPr wrap="square" lIns="125999" tIns="90000" rIns="108000" bIns="54000" rtlCol="0" anchor="ctr"/>
           <a:lstStyle/>
           <a:p>
             <a:pPr algn="l">
@@ -4391,7 +4566,7 @@
               </a:spcAft>
             </a:pPr>
             <a:r>
-              <a:rPr sz="1250" b="1">
+              <a:rPr sz="1250" b="1" dirty="0" err="1">
                 <a:solidFill>
                   <a:srgbClr val="1F285A"/>
                 </a:solidFill>
@@ -4401,6 +4576,14 @@
               </a:rPr>
               <a:t>関心が一番高い直後に案内</a:t>
             </a:r>
+            <a:endParaRPr sz="1250" b="1" dirty="0">
+              <a:solidFill>
+                <a:srgbClr val="1F285A"/>
+              </a:solidFill>
+              <a:latin typeface="メイリオ"/>
+              <a:ea typeface="メイリオ"/>
+              <a:cs typeface="メイリオ"/>
+            </a:endParaRPr>
           </a:p>
           <a:p>
             <a:pPr algn="l">
@@ -4412,7 +4595,7 @@
               </a:spcAft>
             </a:pPr>
             <a:r>
-              <a:rPr sz="1050">
+              <a:rPr sz="1050" dirty="0" err="1">
                 <a:solidFill>
                   <a:srgbClr val="333333"/>
                 </a:solidFill>
@@ -4420,8 +4603,27 @@
                 <a:ea typeface="メイリオ"/>
                 <a:cs typeface="メイリオ"/>
               </a:rPr>
-              <a:t>申込みの直後なので、友だちになっていただきやすい</a:t>
-            </a:r>
+              <a:t>申込みの直後なので、友だちにな</a:t>
+            </a:r>
+            <a:r>
+              <a:rPr lang="ja-JP" altLang="en-US" sz="1050" dirty="0">
+                <a:solidFill>
+                  <a:srgbClr val="333333"/>
+                </a:solidFill>
+                <a:latin typeface="メイリオ"/>
+                <a:ea typeface="メイリオ"/>
+                <a:cs typeface="メイリオ"/>
+              </a:rPr>
+              <a:t>りやすい</a:t>
+            </a:r>
+            <a:endParaRPr sz="1050" dirty="0">
+              <a:solidFill>
+                <a:srgbClr val="333333"/>
+              </a:solidFill>
+              <a:latin typeface="メイリオ"/>
+              <a:ea typeface="メイリオ"/>
+              <a:cs typeface="メイリオ"/>
+            </a:endParaRPr>
           </a:p>
         </p:txBody>
       </p:sp>
@@ -4464,7 +4666,7 @@
           </a:fontRef>
         </p:style>
         <p:txBody>
-          <a:bodyPr rtlCol="0" anchor="ctr" wrap="square" lIns="125999" rIns="108000" tIns="90000" bIns="54000"/>
+          <a:bodyPr wrap="square" lIns="125999" tIns="90000" rIns="108000" bIns="54000" rtlCol="0" anchor="ctr"/>
           <a:lstStyle/>
           <a:p>
             <a:pPr algn="l">
@@ -4473,7 +4675,7 @@
               </a:spcAft>
             </a:pPr>
             <a:r>
-              <a:rPr sz="1250" b="1">
+              <a:rPr sz="1250" b="1" dirty="0" err="1">
                 <a:solidFill>
                   <a:srgbClr val="1F285A"/>
                 </a:solidFill>
@@ -4483,6 +4685,14 @@
               </a:rPr>
               <a:t>友だち集めの広告費ゼロ</a:t>
             </a:r>
+            <a:endParaRPr sz="1250" b="1" dirty="0">
+              <a:solidFill>
+                <a:srgbClr val="1F285A"/>
+              </a:solidFill>
+              <a:latin typeface="メイリオ"/>
+              <a:ea typeface="メイリオ"/>
+              <a:cs typeface="メイリオ"/>
+            </a:endParaRPr>
           </a:p>
           <a:p>
             <a:pPr algn="l">
@@ -4494,7 +4704,7 @@
               </a:spcAft>
             </a:pPr>
             <a:r>
-              <a:rPr sz="1050">
+              <a:rPr sz="1050" dirty="0" err="1">
                 <a:solidFill>
                   <a:srgbClr val="333333"/>
                 </a:solidFill>
@@ -4502,69 +4712,27 @@
                 <a:ea typeface="メイリオ"/>
                 <a:cs typeface="メイリオ"/>
               </a:rPr>
-              <a:t>今の広告で集めた申込みを、そのままLINEへ</a:t>
-            </a:r>
-          </a:p>
-        </p:txBody>
-      </p:sp>
-      <p:sp>
-        <p:nvSpPr>
-          <p:cNvPr id="15" name="Rounded Rectangle 14"/>
-          <p:cNvSpPr/>
-          <p:nvPr/>
-        </p:nvSpPr>
-        <p:spPr>
-          <a:xfrm>
-            <a:off x="6523199" y="3709801"/>
-            <a:ext cx="2951999" cy="936000"/>
-          </a:xfrm>
-          <a:prstGeom prst="roundRect">
-            <a:avLst>
-              <a:gd name="adj" fmla="val 6000"/>
-            </a:avLst>
-          </a:prstGeom>
-          <a:solidFill>
-            <a:srgbClr val="F4F7FF"/>
-          </a:solidFill>
-          <a:ln>
-            <a:noFill/>
-          </a:ln>
-          <a:effectLst/>
-        </p:spPr>
-        <p:style>
-          <a:lnRef idx="1">
-            <a:schemeClr val="accent1"/>
-          </a:lnRef>
-          <a:fillRef idx="3">
-            <a:schemeClr val="accent1"/>
-          </a:fillRef>
-          <a:effectRef idx="2">
-            <a:schemeClr val="accent1"/>
-          </a:effectRef>
-          <a:fontRef idx="minor">
-            <a:schemeClr val="lt1"/>
-          </a:fontRef>
-        </p:style>
-        <p:txBody>
-          <a:bodyPr rtlCol="0" anchor="ctr" wrap="square" lIns="125999" rIns="108000" tIns="90000" bIns="54000"/>
-          <a:lstStyle/>
-          <a:p>
-            <a:pPr algn="l">
-              <a:spcAft>
-                <a:spcPts val="500"/>
-              </a:spcAft>
-            </a:pPr>
-            <a:r>
-              <a:rPr sz="1250" b="1">
-                <a:solidFill>
-                  <a:srgbClr val="1F285A"/>
-                </a:solidFill>
-                <a:latin typeface="メイリオ"/>
-                <a:ea typeface="メイリオ"/>
-                <a:cs typeface="メイリオ"/>
-              </a:rPr>
-              <a:t>入力内容をそのまま活用</a:t>
-            </a:r>
+              <a:t>今の広告で集めた申込みを</a:t>
+            </a:r>
+            <a:r>
+              <a:rPr sz="1050" dirty="0">
+                <a:solidFill>
+                  <a:srgbClr val="333333"/>
+                </a:solidFill>
+                <a:latin typeface="メイリオ"/>
+                <a:ea typeface="メイリオ"/>
+                <a:cs typeface="メイリオ"/>
+              </a:rPr>
+              <a:t>、</a:t>
+            </a:r>
+            <a:endParaRPr lang="en-US" sz="1050" dirty="0">
+              <a:solidFill>
+                <a:srgbClr val="333333"/>
+              </a:solidFill>
+              <a:latin typeface="メイリオ"/>
+              <a:ea typeface="メイリオ"/>
+              <a:cs typeface="メイリオ"/>
+            </a:endParaRPr>
           </a:p>
           <a:p>
             <a:pPr algn="l">
@@ -4576,7 +4744,7 @@
               </a:spcAft>
             </a:pPr>
             <a:r>
-              <a:rPr sz="1050">
+              <a:rPr sz="1050" dirty="0" err="1">
                 <a:solidFill>
                   <a:srgbClr val="333333"/>
                 </a:solidFill>
@@ -4584,29 +4752,48 @@
                 <a:ea typeface="メイリオ"/>
                 <a:cs typeface="メイリオ"/>
               </a:rPr>
-              <a:t>トークに反映し、配信の出し分けにも使える</a:t>
-            </a:r>
-          </a:p>
-        </p:txBody>
-      </p:sp>
-      <p:sp>
-        <p:nvSpPr>
-          <p:cNvPr id="16" name="Rounded Rectangle 15"/>
+              <a:t>そのままLINE</a:t>
+            </a:r>
+            <a:r>
+              <a:rPr lang="ja-JP" altLang="en-US" sz="1050" dirty="0">
+                <a:solidFill>
+                  <a:srgbClr val="333333"/>
+                </a:solidFill>
+                <a:latin typeface="メイリオ"/>
+                <a:ea typeface="メイリオ"/>
+                <a:cs typeface="メイリオ"/>
+              </a:rPr>
+              <a:t>で当日まで</a:t>
+            </a:r>
+            <a:endParaRPr sz="1050" dirty="0">
+              <a:solidFill>
+                <a:srgbClr val="333333"/>
+              </a:solidFill>
+              <a:latin typeface="メイリオ"/>
+              <a:ea typeface="メイリオ"/>
+              <a:cs typeface="メイリオ"/>
+            </a:endParaRPr>
+          </a:p>
+        </p:txBody>
+      </p:sp>
+      <p:sp>
+        <p:nvSpPr>
+          <p:cNvPr id="15" name="Rounded Rectangle 14"/>
           <p:cNvSpPr/>
           <p:nvPr/>
         </p:nvSpPr>
         <p:spPr>
           <a:xfrm>
-            <a:off x="432000" y="4861800"/>
-            <a:ext cx="1655999" cy="324000"/>
+            <a:off x="6523199" y="3709801"/>
+            <a:ext cx="2951999" cy="936000"/>
           </a:xfrm>
           <a:prstGeom prst="roundRect">
             <a:avLst>
-              <a:gd name="adj" fmla="val 18000"/>
+              <a:gd name="adj" fmla="val 6000"/>
             </a:avLst>
           </a:prstGeom>
           <a:solidFill>
-            <a:srgbClr val="1F285A"/>
+            <a:srgbClr val="F4F7FF"/>
           </a:solidFill>
           <a:ln>
             <a:noFill/>
@@ -4628,33 +4815,85 @@
           </a:fontRef>
         </p:style>
         <p:txBody>
-          <a:bodyPr rtlCol="0" anchor="ctr" wrap="square" lIns="36000" rIns="36000" tIns="0" bIns="0"/>
+          <a:bodyPr wrap="square" lIns="125999" tIns="90000" rIns="108000" bIns="54000" rtlCol="0" anchor="ctr"/>
           <a:lstStyle/>
           <a:p>
-            <a:pPr algn="ctr"/>
-            <a:r>
-              <a:rPr sz="1300" b="1">
-                <a:solidFill>
-                  <a:srgbClr val="FFFFFF"/>
-                </a:solidFill>
-                <a:latin typeface="メイリオ"/>
-                <a:ea typeface="メイリオ"/>
-                <a:cs typeface="メイリオ"/>
-              </a:rPr>
-              <a:t>初期 10万円</a:t>
-            </a:r>
-          </a:p>
-        </p:txBody>
-      </p:sp>
-      <p:sp>
-        <p:nvSpPr>
-          <p:cNvPr id="17" name="Rounded Rectangle 16"/>
+            <a:pPr algn="l">
+              <a:spcAft>
+                <a:spcPts val="500"/>
+              </a:spcAft>
+            </a:pPr>
+            <a:r>
+              <a:rPr sz="1250" b="1" dirty="0" err="1">
+                <a:solidFill>
+                  <a:srgbClr val="1F285A"/>
+                </a:solidFill>
+                <a:latin typeface="メイリオ"/>
+                <a:ea typeface="メイリオ"/>
+                <a:cs typeface="メイリオ"/>
+              </a:rPr>
+              <a:t>入力内容をそのまま活用</a:t>
+            </a:r>
+            <a:endParaRPr sz="1250" b="1" dirty="0">
+              <a:solidFill>
+                <a:srgbClr val="1F285A"/>
+              </a:solidFill>
+              <a:latin typeface="メイリオ"/>
+              <a:ea typeface="メイリオ"/>
+              <a:cs typeface="メイリオ"/>
+            </a:endParaRPr>
+          </a:p>
+          <a:p>
+            <a:pPr algn="l">
+              <a:lnSpc>
+                <a:spcPct val="125000"/>
+              </a:lnSpc>
+              <a:spcAft>
+                <a:spcPts val="200"/>
+              </a:spcAft>
+            </a:pPr>
+            <a:r>
+              <a:rPr sz="1050" dirty="0" err="1">
+                <a:solidFill>
+                  <a:srgbClr val="333333"/>
+                </a:solidFill>
+                <a:latin typeface="メイリオ"/>
+                <a:ea typeface="メイリオ"/>
+                <a:cs typeface="メイリオ"/>
+              </a:rPr>
+              <a:t>トークに反映し、配信の出し分けにも</a:t>
+            </a:r>
+            <a:r>
+              <a:rPr lang="ja-JP" altLang="en-US" sz="1050" dirty="0">
+                <a:solidFill>
+                  <a:srgbClr val="333333"/>
+                </a:solidFill>
+                <a:latin typeface="メイリオ"/>
+                <a:ea typeface="メイリオ"/>
+                <a:cs typeface="メイリオ"/>
+              </a:rPr>
+              <a:t>有効</a:t>
+            </a:r>
+            <a:endParaRPr sz="1050" dirty="0">
+              <a:solidFill>
+                <a:srgbClr val="333333"/>
+              </a:solidFill>
+              <a:latin typeface="メイリオ"/>
+              <a:ea typeface="メイリオ"/>
+              <a:cs typeface="メイリオ"/>
+            </a:endParaRPr>
+          </a:p>
+        </p:txBody>
+      </p:sp>
+      <p:sp>
+        <p:nvSpPr>
+          <p:cNvPr id="16" name="Rounded Rectangle 15"/>
           <p:cNvSpPr/>
           <p:nvPr/>
         </p:nvSpPr>
         <p:spPr>
           <a:xfrm>
-            <a:off x="2160000" y="4861800"/>
+            <a:off x="1655999" y="5274000"/>
             <a:ext cx="1655999" cy="324000"/>
           </a:xfrm>
           <a:prstGeom prst="roundRect">
@@ -4685,12 +4924,69 @@
           </a:fontRef>
         </p:style>
         <p:txBody>
-          <a:bodyPr rtlCol="0" anchor="ctr" wrap="square" lIns="36000" rIns="36000" tIns="0" bIns="0"/>
+          <a:bodyPr wrap="square" lIns="36000" tIns="0" rIns="36000" bIns="0" rtlCol="0" anchor="ctr"/>
           <a:lstStyle/>
           <a:p>
             <a:pPr algn="ctr"/>
             <a:r>
-              <a:rPr sz="1300" b="1">
+              <a:rPr sz="1600" b="1">
+                <a:solidFill>
+                  <a:srgbClr val="FFFFFF"/>
+                </a:solidFill>
+                <a:latin typeface="メイリオ"/>
+                <a:ea typeface="メイリオ"/>
+                <a:cs typeface="メイリオ"/>
+              </a:rPr>
+              <a:t>初期 10万円</a:t>
+            </a:r>
+          </a:p>
+        </p:txBody>
+      </p:sp>
+      <p:sp>
+        <p:nvSpPr>
+          <p:cNvPr id="17" name="Rounded Rectangle 16"/>
+          <p:cNvSpPr/>
+          <p:nvPr/>
+        </p:nvSpPr>
+        <p:spPr>
+          <a:xfrm>
+            <a:off x="3383999" y="5274000"/>
+            <a:ext cx="1655999" cy="324000"/>
+          </a:xfrm>
+          <a:prstGeom prst="roundRect">
+            <a:avLst>
+              <a:gd name="adj" fmla="val 18000"/>
+            </a:avLst>
+          </a:prstGeom>
+          <a:solidFill>
+            <a:srgbClr val="1F285A"/>
+          </a:solidFill>
+          <a:ln>
+            <a:noFill/>
+          </a:ln>
+          <a:effectLst/>
+        </p:spPr>
+        <p:style>
+          <a:lnRef idx="1">
+            <a:schemeClr val="accent1"/>
+          </a:lnRef>
+          <a:fillRef idx="3">
+            <a:schemeClr val="accent1"/>
+          </a:fillRef>
+          <a:effectRef idx="2">
+            <a:schemeClr val="accent1"/>
+          </a:effectRef>
+          <a:fontRef idx="minor">
+            <a:schemeClr val="lt1"/>
+          </a:fontRef>
+        </p:style>
+        <p:txBody>
+          <a:bodyPr wrap="square" lIns="36000" tIns="0" rIns="36000" bIns="0" rtlCol="0" anchor="ctr"/>
+          <a:lstStyle/>
+          <a:p>
+            <a:pPr algn="ctr"/>
+            <a:r>
+              <a:rPr sz="1600" b="1">
                 <a:solidFill>
                   <a:srgbClr val="FFFFFF"/>
                 </a:solidFill>
@@ -4711,8 +5007,8 @@
         </p:nvSpPr>
         <p:spPr>
           <a:xfrm>
-            <a:off x="3960000" y="4861800"/>
-            <a:ext cx="5508000" cy="324000"/>
+            <a:off x="5183999" y="5306468"/>
+            <a:ext cx="5508000" cy="259065"/>
           </a:xfrm>
           <a:prstGeom prst="rect">
             <a:avLst/>
@@ -4720,14 +5016,14 @@
           <a:noFill/>
         </p:spPr>
         <p:txBody>
-          <a:bodyPr wrap="square" lIns="0" rIns="50400" tIns="21600" bIns="21600" anchor="ctr">
+          <a:bodyPr wrap="square" lIns="0" tIns="21600" rIns="50400" bIns="21600" anchor="ctr">
             <a:spAutoFit/>
           </a:bodyPr>
           <a:lstStyle/>
           <a:p>
             <a:pPr algn="l"/>
             <a:r>
-              <a:rPr sz="1100">
+              <a:rPr sz="1400" dirty="0" err="1">
                 <a:solidFill>
                   <a:srgbClr val="333333"/>
                 </a:solidFill>
@@ -4735,8 +5031,16 @@
                 <a:ea typeface="メイリオ"/>
                 <a:cs typeface="メイリオ"/>
               </a:rPr>
-              <a:t>既存のAPIツールとの併用も可能です</a:t>
-            </a:r>
+              <a:t>既存のAPIツールとの併用も可能</a:t>
+            </a:r>
+            <a:endParaRPr sz="1400" dirty="0">
+              <a:solidFill>
+                <a:srgbClr val="333333"/>
+              </a:solidFill>
+              <a:latin typeface="メイリオ"/>
+              <a:ea typeface="メイリオ"/>
+              <a:cs typeface="メイリオ"/>
+            </a:endParaRPr>
           </a:p>
         </p:txBody>
       </p:sp>
@@ -4744,6 +5048,1095 @@
     <p:extLst>
       <p:ext uri="{BB962C8B-B14F-4D97-AF65-F5344CB8AC3E}">
         <p14:creationId xmlns:p14="http://schemas.microsoft.com/office/powerpoint/2010/main" val="1715909323"/>
+      </p:ext>
+    </p:extLst>
+  </p:cSld>
+  <p:clrMapOvr>
+    <a:masterClrMapping/>
+  </p:clrMapOvr>
+</p:sld>
+</file>
+
+<file path=ppt/slides/slide3.xml><?xml version="1.0" encoding="utf-8"?>
+<p:sld xmlns:a="http://schemas.openxmlformats.org/drawingml/2006/main" xmlns:r="http://schemas.openxmlformats.org/officeDocument/2006/relationships" xmlns:p="http://schemas.openxmlformats.org/presentationml/2006/main">
+  <p:cSld>
+    <p:spTree>
+      <p:nvGrpSpPr>
+        <p:cNvPr id="1" name=""/>
+        <p:cNvGrpSpPr/>
+        <p:nvPr/>
+      </p:nvGrpSpPr>
+      <p:grpSpPr>
+        <a:xfrm>
+          <a:off x="0" y="0"/>
+          <a:ext cx="0" cy="0"/>
+          <a:chOff x="0" y="0"/>
+          <a:chExt cx="0" cy="0"/>
+        </a:xfrm>
+      </p:grpSpPr>
+      <p:sp>
+        <p:nvSpPr>
+          <p:cNvPr id="2" name="TextBox 1"/>
+          <p:cNvSpPr txBox="1"/>
+          <p:nvPr/>
+        </p:nvSpPr>
+        <p:spPr>
+          <a:xfrm>
+            <a:off x="547200" y="136800"/>
+            <a:ext cx="8784000" cy="338400"/>
+          </a:xfrm>
+          <a:prstGeom prst="rect">
+            <a:avLst/>
+          </a:prstGeom>
+          <a:noFill/>
+        </p:spPr>
+        <p:txBody>
+          <a:bodyPr wrap="square" lIns="0" tIns="21600" rIns="0" bIns="21600" anchor="ctr">
+            <a:spAutoFit/>
+          </a:bodyPr>
+          <a:lstStyle/>
+          <a:p>
+            <a:pPr algn="l"/>
+            <a:r>
+              <a:rPr sz="1600" b="1">
+                <a:solidFill>
+                  <a:srgbClr val="002060"/>
+                </a:solidFill>
+                <a:latin typeface="メイリオ"/>
+                <a:ea typeface="メイリオ"/>
+                <a:cs typeface="メイリオ"/>
+              </a:rPr>
+              <a:t>LINEで、成果まで育てる</a:t>
+            </a:r>
+          </a:p>
+        </p:txBody>
+      </p:sp>
+      <p:sp>
+        <p:nvSpPr>
+          <p:cNvPr id="3" name="TextBox 2"/>
+          <p:cNvSpPr txBox="1"/>
+          <p:nvPr/>
+        </p:nvSpPr>
+        <p:spPr>
+          <a:xfrm>
+            <a:off x="432000" y="836230"/>
+            <a:ext cx="9036000" cy="307540"/>
+          </a:xfrm>
+          <a:prstGeom prst="rect">
+            <a:avLst/>
+          </a:prstGeom>
+          <a:noFill/>
+        </p:spPr>
+        <p:txBody>
+          <a:bodyPr wrap="square" lIns="0" tIns="21600" rIns="0" bIns="21600" anchor="ctr">
+            <a:spAutoFit/>
+          </a:bodyPr>
+          <a:lstStyle/>
+          <a:p>
+            <a:pPr algn="l">
+              <a:lnSpc>
+                <a:spcPct val="130000"/>
+              </a:lnSpc>
+            </a:pPr>
+            <a:r>
+              <a:rPr sz="1400" dirty="0" err="1">
+                <a:solidFill>
+                  <a:srgbClr val="333333"/>
+                </a:solidFill>
+                <a:latin typeface="メイリオ"/>
+                <a:ea typeface="メイリオ"/>
+                <a:cs typeface="メイリオ"/>
+              </a:rPr>
+              <a:t>申込んだ方に合わせて、LINEで次の一歩</a:t>
+            </a:r>
+            <a:r>
+              <a:rPr lang="ja-JP" altLang="en-US" sz="1400" dirty="0">
+                <a:solidFill>
+                  <a:srgbClr val="333333"/>
+                </a:solidFill>
+                <a:latin typeface="メイリオ"/>
+                <a:ea typeface="メイリオ"/>
+                <a:cs typeface="メイリオ"/>
+              </a:rPr>
+              <a:t>へとつなげる</a:t>
+            </a:r>
+            <a:endParaRPr sz="1400" dirty="0">
+              <a:solidFill>
+                <a:srgbClr val="333333"/>
+              </a:solidFill>
+              <a:latin typeface="メイリオ"/>
+              <a:ea typeface="メイリオ"/>
+              <a:cs typeface="メイリオ"/>
+            </a:endParaRPr>
+          </a:p>
+        </p:txBody>
+      </p:sp>
+      <p:cxnSp>
+        <p:nvCxnSpPr>
+          <p:cNvPr id="4" name="Connector 3"/>
+          <p:cNvCxnSpPr/>
+          <p:nvPr/>
+        </p:nvCxnSpPr>
+        <p:spPr>
+          <a:xfrm>
+            <a:off x="0" y="1389600"/>
+            <a:ext cx="9907200" cy="0"/>
+          </a:xfrm>
+          <a:prstGeom prst="line">
+            <a:avLst/>
+          </a:prstGeom>
+          <a:ln w="12700">
+            <a:solidFill>
+              <a:srgbClr val="D9D9D9"/>
+            </a:solidFill>
+          </a:ln>
+        </p:spPr>
+        <p:style>
+          <a:lnRef idx="2">
+            <a:schemeClr val="accent1"/>
+          </a:lnRef>
+          <a:fillRef idx="0">
+            <a:schemeClr val="accent1"/>
+          </a:fillRef>
+          <a:effectRef idx="1">
+            <a:schemeClr val="accent1"/>
+          </a:effectRef>
+          <a:fontRef idx="minor">
+            <a:schemeClr val="tx1"/>
+          </a:fontRef>
+        </p:style>
+      </p:cxnSp>
+      <p:sp>
+        <p:nvSpPr>
+          <p:cNvPr id="5" name="Rounded Rectangle 4"/>
+          <p:cNvSpPr/>
+          <p:nvPr/>
+        </p:nvSpPr>
+        <p:spPr>
+          <a:xfrm>
+            <a:off x="432000" y="2215800"/>
+            <a:ext cx="2951999" cy="503999"/>
+          </a:xfrm>
+          <a:prstGeom prst="roundRect">
+            <a:avLst>
+              <a:gd name="adj" fmla="val 10000"/>
+            </a:avLst>
+          </a:prstGeom>
+          <a:solidFill>
+            <a:srgbClr val="1F285A"/>
+          </a:solidFill>
+          <a:ln>
+            <a:noFill/>
+          </a:ln>
+          <a:effectLst/>
+        </p:spPr>
+        <p:style>
+          <a:lnRef idx="1">
+            <a:schemeClr val="accent1"/>
+          </a:lnRef>
+          <a:fillRef idx="3">
+            <a:schemeClr val="accent1"/>
+          </a:fillRef>
+          <a:effectRef idx="2">
+            <a:schemeClr val="accent1"/>
+          </a:effectRef>
+          <a:fontRef idx="minor">
+            <a:schemeClr val="lt1"/>
+          </a:fontRef>
+        </p:style>
+        <p:txBody>
+          <a:bodyPr wrap="square" lIns="54000" tIns="18000" rIns="54000" bIns="18000" rtlCol="0" anchor="ctr"/>
+          <a:lstStyle/>
+          <a:p>
+            <a:pPr algn="ctr">
+              <a:lnSpc>
+                <a:spcPct val="120000"/>
+              </a:lnSpc>
+            </a:pPr>
+            <a:r>
+              <a:rPr sz="1400" b="1">
+                <a:solidFill>
+                  <a:srgbClr val="FFFFFF"/>
+                </a:solidFill>
+                <a:latin typeface="メイリオ"/>
+                <a:ea typeface="メイリオ"/>
+                <a:cs typeface="メイリオ"/>
+              </a:rPr>
+              <a:t>資料請求した方</a:t>
+            </a:r>
+          </a:p>
+        </p:txBody>
+      </p:sp>
+      <p:sp>
+        <p:nvSpPr>
+          <p:cNvPr id="6" name="Down Arrow 5"/>
+          <p:cNvSpPr/>
+          <p:nvPr/>
+        </p:nvSpPr>
+        <p:spPr>
+          <a:xfrm>
+            <a:off x="1692000" y="2773801"/>
+            <a:ext cx="432000" cy="251999"/>
+          </a:xfrm>
+          <a:prstGeom prst="downArrow">
+            <a:avLst/>
+          </a:prstGeom>
+          <a:solidFill>
+            <a:srgbClr val="1F285A"/>
+          </a:solidFill>
+          <a:ln>
+            <a:noFill/>
+          </a:ln>
+          <a:effectLst/>
+        </p:spPr>
+        <p:style>
+          <a:lnRef idx="1">
+            <a:schemeClr val="accent1"/>
+          </a:lnRef>
+          <a:fillRef idx="3">
+            <a:schemeClr val="accent1"/>
+          </a:fillRef>
+          <a:effectRef idx="2">
+            <a:schemeClr val="accent1"/>
+          </a:effectRef>
+          <a:fontRef idx="minor">
+            <a:schemeClr val="lt1"/>
+          </a:fontRef>
+        </p:style>
+        <p:txBody>
+          <a:bodyPr rtlCol="0" anchor="ctr"/>
+          <a:lstStyle/>
+          <a:p>
+            <a:pPr algn="ctr"/>
+            <a:endParaRPr/>
+          </a:p>
+        </p:txBody>
+      </p:sp>
+      <p:sp>
+        <p:nvSpPr>
+          <p:cNvPr id="7" name="Rounded Rectangle 6"/>
+          <p:cNvSpPr/>
+          <p:nvPr/>
+        </p:nvSpPr>
+        <p:spPr>
+          <a:xfrm>
+            <a:off x="432000" y="3079801"/>
+            <a:ext cx="2951999" cy="648000"/>
+          </a:xfrm>
+          <a:prstGeom prst="roundRect">
+            <a:avLst>
+              <a:gd name="adj" fmla="val 10000"/>
+            </a:avLst>
+          </a:prstGeom>
+          <a:solidFill>
+            <a:srgbClr val="F4F7FF"/>
+          </a:solidFill>
+          <a:ln w="12700">
+            <a:solidFill>
+              <a:srgbClr val="D9D9D9"/>
+            </a:solidFill>
+          </a:ln>
+          <a:effectLst/>
+        </p:spPr>
+        <p:style>
+          <a:lnRef idx="1">
+            <a:schemeClr val="accent1"/>
+          </a:lnRef>
+          <a:fillRef idx="3">
+            <a:schemeClr val="accent1"/>
+          </a:fillRef>
+          <a:effectRef idx="2">
+            <a:schemeClr val="accent1"/>
+          </a:effectRef>
+          <a:fontRef idx="minor">
+            <a:schemeClr val="lt1"/>
+          </a:fontRef>
+        </p:style>
+        <p:txBody>
+          <a:bodyPr wrap="square" lIns="54000" tIns="18000" rIns="54000" bIns="18000" rtlCol="0" anchor="ctr"/>
+          <a:lstStyle/>
+          <a:p>
+            <a:pPr algn="ctr">
+              <a:lnSpc>
+                <a:spcPct val="120000"/>
+              </a:lnSpc>
+            </a:pPr>
+            <a:r>
+              <a:rPr sz="1300" b="1">
+                <a:solidFill>
+                  <a:srgbClr val="1F285A"/>
+                </a:solidFill>
+                <a:latin typeface="メイリオ"/>
+                <a:ea typeface="メイリオ"/>
+                <a:cs typeface="メイリオ"/>
+              </a:rPr>
+              <a:t>比較のポイント・事例</a:t>
+            </a:r>
+          </a:p>
+        </p:txBody>
+      </p:sp>
+      <p:sp>
+        <p:nvSpPr>
+          <p:cNvPr id="8" name="Down Arrow 7"/>
+          <p:cNvSpPr/>
+          <p:nvPr/>
+        </p:nvSpPr>
+        <p:spPr>
+          <a:xfrm>
+            <a:off x="1692000" y="3781800"/>
+            <a:ext cx="432000" cy="251999"/>
+          </a:xfrm>
+          <a:prstGeom prst="downArrow">
+            <a:avLst/>
+          </a:prstGeom>
+          <a:solidFill>
+            <a:srgbClr val="06C755"/>
+          </a:solidFill>
+          <a:ln>
+            <a:noFill/>
+          </a:ln>
+          <a:effectLst/>
+        </p:spPr>
+        <p:style>
+          <a:lnRef idx="1">
+            <a:schemeClr val="accent1"/>
+          </a:lnRef>
+          <a:fillRef idx="3">
+            <a:schemeClr val="accent1"/>
+          </a:fillRef>
+          <a:effectRef idx="2">
+            <a:schemeClr val="accent1"/>
+          </a:effectRef>
+          <a:fontRef idx="minor">
+            <a:schemeClr val="lt1"/>
+          </a:fontRef>
+        </p:style>
+        <p:txBody>
+          <a:bodyPr rtlCol="0" anchor="ctr"/>
+          <a:lstStyle/>
+          <a:p>
+            <a:pPr algn="ctr"/>
+            <a:endParaRPr/>
+          </a:p>
+        </p:txBody>
+      </p:sp>
+      <p:sp>
+        <p:nvSpPr>
+          <p:cNvPr id="9" name="Rounded Rectangle 8"/>
+          <p:cNvSpPr/>
+          <p:nvPr/>
+        </p:nvSpPr>
+        <p:spPr>
+          <a:xfrm>
+            <a:off x="432000" y="4087801"/>
+            <a:ext cx="2951999" cy="503999"/>
+          </a:xfrm>
+          <a:prstGeom prst="roundRect">
+            <a:avLst>
+              <a:gd name="adj" fmla="val 10000"/>
+            </a:avLst>
+          </a:prstGeom>
+          <a:solidFill>
+            <a:srgbClr val="06C755"/>
+          </a:solidFill>
+          <a:ln>
+            <a:noFill/>
+          </a:ln>
+          <a:effectLst/>
+        </p:spPr>
+        <p:style>
+          <a:lnRef idx="1">
+            <a:schemeClr val="accent1"/>
+          </a:lnRef>
+          <a:fillRef idx="3">
+            <a:schemeClr val="accent1"/>
+          </a:fillRef>
+          <a:effectRef idx="2">
+            <a:schemeClr val="accent1"/>
+          </a:effectRef>
+          <a:fontRef idx="minor">
+            <a:schemeClr val="lt1"/>
+          </a:fontRef>
+        </p:style>
+        <p:txBody>
+          <a:bodyPr wrap="square" lIns="54000" tIns="18000" rIns="54000" bIns="18000" rtlCol="0" anchor="ctr"/>
+          <a:lstStyle/>
+          <a:p>
+            <a:pPr algn="ctr">
+              <a:lnSpc>
+                <a:spcPct val="120000"/>
+              </a:lnSpc>
+            </a:pPr>
+            <a:r>
+              <a:rPr sz="1400" b="1">
+                <a:solidFill>
+                  <a:srgbClr val="FFFFFF"/>
+                </a:solidFill>
+                <a:latin typeface="メイリオ"/>
+                <a:ea typeface="メイリオ"/>
+                <a:cs typeface="メイリオ"/>
+              </a:rPr>
+              <a:t>来店・商談へ</a:t>
+            </a:r>
+          </a:p>
+        </p:txBody>
+      </p:sp>
+      <p:sp>
+        <p:nvSpPr>
+          <p:cNvPr id="10" name="Rounded Rectangle 9"/>
+          <p:cNvSpPr/>
+          <p:nvPr/>
+        </p:nvSpPr>
+        <p:spPr>
+          <a:xfrm>
+            <a:off x="3477599" y="2215800"/>
+            <a:ext cx="2951999" cy="503999"/>
+          </a:xfrm>
+          <a:prstGeom prst="roundRect">
+            <a:avLst>
+              <a:gd name="adj" fmla="val 10000"/>
+            </a:avLst>
+          </a:prstGeom>
+          <a:solidFill>
+            <a:srgbClr val="1F285A"/>
+          </a:solidFill>
+          <a:ln>
+            <a:noFill/>
+          </a:ln>
+          <a:effectLst/>
+        </p:spPr>
+        <p:style>
+          <a:lnRef idx="1">
+            <a:schemeClr val="accent1"/>
+          </a:lnRef>
+          <a:fillRef idx="3">
+            <a:schemeClr val="accent1"/>
+          </a:fillRef>
+          <a:effectRef idx="2">
+            <a:schemeClr val="accent1"/>
+          </a:effectRef>
+          <a:fontRef idx="minor">
+            <a:schemeClr val="lt1"/>
+          </a:fontRef>
+        </p:style>
+        <p:txBody>
+          <a:bodyPr wrap="square" lIns="54000" tIns="18000" rIns="54000" bIns="18000" rtlCol="0" anchor="ctr"/>
+          <a:lstStyle/>
+          <a:p>
+            <a:pPr algn="ctr">
+              <a:lnSpc>
+                <a:spcPct val="120000"/>
+              </a:lnSpc>
+            </a:pPr>
+            <a:r>
+              <a:rPr sz="1400" b="1">
+                <a:solidFill>
+                  <a:srgbClr val="FFFFFF"/>
+                </a:solidFill>
+                <a:latin typeface="メイリオ"/>
+                <a:ea typeface="メイリオ"/>
+                <a:cs typeface="メイリオ"/>
+              </a:rPr>
+              <a:t>予約した方</a:t>
+            </a:r>
+          </a:p>
+        </p:txBody>
+      </p:sp>
+      <p:sp>
+        <p:nvSpPr>
+          <p:cNvPr id="11" name="Down Arrow 10"/>
+          <p:cNvSpPr/>
+          <p:nvPr/>
+        </p:nvSpPr>
+        <p:spPr>
+          <a:xfrm>
+            <a:off x="4737599" y="2773801"/>
+            <a:ext cx="432000" cy="251999"/>
+          </a:xfrm>
+          <a:prstGeom prst="downArrow">
+            <a:avLst/>
+          </a:prstGeom>
+          <a:solidFill>
+            <a:srgbClr val="1F285A"/>
+          </a:solidFill>
+          <a:ln>
+            <a:noFill/>
+          </a:ln>
+          <a:effectLst/>
+        </p:spPr>
+        <p:style>
+          <a:lnRef idx="1">
+            <a:schemeClr val="accent1"/>
+          </a:lnRef>
+          <a:fillRef idx="3">
+            <a:schemeClr val="accent1"/>
+          </a:fillRef>
+          <a:effectRef idx="2">
+            <a:schemeClr val="accent1"/>
+          </a:effectRef>
+          <a:fontRef idx="minor">
+            <a:schemeClr val="lt1"/>
+          </a:fontRef>
+        </p:style>
+        <p:txBody>
+          <a:bodyPr rtlCol="0" anchor="ctr"/>
+          <a:lstStyle/>
+          <a:p>
+            <a:pPr algn="ctr"/>
+            <a:endParaRPr/>
+          </a:p>
+        </p:txBody>
+      </p:sp>
+      <p:sp>
+        <p:nvSpPr>
+          <p:cNvPr id="12" name="Rounded Rectangle 11"/>
+          <p:cNvSpPr/>
+          <p:nvPr/>
+        </p:nvSpPr>
+        <p:spPr>
+          <a:xfrm>
+            <a:off x="3477599" y="3079801"/>
+            <a:ext cx="2951999" cy="648000"/>
+          </a:xfrm>
+          <a:prstGeom prst="roundRect">
+            <a:avLst>
+              <a:gd name="adj" fmla="val 10000"/>
+            </a:avLst>
+          </a:prstGeom>
+          <a:solidFill>
+            <a:srgbClr val="F4F7FF"/>
+          </a:solidFill>
+          <a:ln w="12700">
+            <a:solidFill>
+              <a:srgbClr val="D9D9D9"/>
+            </a:solidFill>
+          </a:ln>
+          <a:effectLst/>
+        </p:spPr>
+        <p:style>
+          <a:lnRef idx="1">
+            <a:schemeClr val="accent1"/>
+          </a:lnRef>
+          <a:fillRef idx="3">
+            <a:schemeClr val="accent1"/>
+          </a:fillRef>
+          <a:effectRef idx="2">
+            <a:schemeClr val="accent1"/>
+          </a:effectRef>
+          <a:fontRef idx="minor">
+            <a:schemeClr val="lt1"/>
+          </a:fontRef>
+        </p:style>
+        <p:txBody>
+          <a:bodyPr wrap="square" lIns="54000" tIns="18000" rIns="54000" bIns="18000" rtlCol="0" anchor="ctr"/>
+          <a:lstStyle/>
+          <a:p>
+            <a:pPr algn="ctr">
+              <a:lnSpc>
+                <a:spcPct val="120000"/>
+              </a:lnSpc>
+            </a:pPr>
+            <a:r>
+              <a:rPr sz="1300" b="1">
+                <a:solidFill>
+                  <a:srgbClr val="1F285A"/>
+                </a:solidFill>
+                <a:latin typeface="メイリオ"/>
+                <a:ea typeface="メイリオ"/>
+                <a:cs typeface="メイリオ"/>
+              </a:rPr>
+              <a:t>前日・当日のリマインド</a:t>
+            </a:r>
+          </a:p>
+        </p:txBody>
+      </p:sp>
+      <p:sp>
+        <p:nvSpPr>
+          <p:cNvPr id="13" name="Down Arrow 12"/>
+          <p:cNvSpPr/>
+          <p:nvPr/>
+        </p:nvSpPr>
+        <p:spPr>
+          <a:xfrm>
+            <a:off x="4737599" y="3781800"/>
+            <a:ext cx="432000" cy="251999"/>
+          </a:xfrm>
+          <a:prstGeom prst="downArrow">
+            <a:avLst/>
+          </a:prstGeom>
+          <a:solidFill>
+            <a:srgbClr val="06C755"/>
+          </a:solidFill>
+          <a:ln>
+            <a:noFill/>
+          </a:ln>
+          <a:effectLst/>
+        </p:spPr>
+        <p:style>
+          <a:lnRef idx="1">
+            <a:schemeClr val="accent1"/>
+          </a:lnRef>
+          <a:fillRef idx="3">
+            <a:schemeClr val="accent1"/>
+          </a:fillRef>
+          <a:effectRef idx="2">
+            <a:schemeClr val="accent1"/>
+          </a:effectRef>
+          <a:fontRef idx="minor">
+            <a:schemeClr val="lt1"/>
+          </a:fontRef>
+        </p:style>
+        <p:txBody>
+          <a:bodyPr rtlCol="0" anchor="ctr"/>
+          <a:lstStyle/>
+          <a:p>
+            <a:pPr algn="ctr"/>
+            <a:endParaRPr/>
+          </a:p>
+        </p:txBody>
+      </p:sp>
+      <p:sp>
+        <p:nvSpPr>
+          <p:cNvPr id="14" name="Rounded Rectangle 13"/>
+          <p:cNvSpPr/>
+          <p:nvPr/>
+        </p:nvSpPr>
+        <p:spPr>
+          <a:xfrm>
+            <a:off x="3477599" y="4087801"/>
+            <a:ext cx="2951999" cy="503999"/>
+          </a:xfrm>
+          <a:prstGeom prst="roundRect">
+            <a:avLst>
+              <a:gd name="adj" fmla="val 10000"/>
+            </a:avLst>
+          </a:prstGeom>
+          <a:solidFill>
+            <a:srgbClr val="06C755"/>
+          </a:solidFill>
+          <a:ln>
+            <a:noFill/>
+          </a:ln>
+          <a:effectLst/>
+        </p:spPr>
+        <p:style>
+          <a:lnRef idx="1">
+            <a:schemeClr val="accent1"/>
+          </a:lnRef>
+          <a:fillRef idx="3">
+            <a:schemeClr val="accent1"/>
+          </a:fillRef>
+          <a:effectRef idx="2">
+            <a:schemeClr val="accent1"/>
+          </a:effectRef>
+          <a:fontRef idx="minor">
+            <a:schemeClr val="lt1"/>
+          </a:fontRef>
+        </p:style>
+        <p:txBody>
+          <a:bodyPr wrap="square" lIns="54000" tIns="18000" rIns="54000" bIns="18000" rtlCol="0" anchor="ctr"/>
+          <a:lstStyle/>
+          <a:p>
+            <a:pPr algn="ctr">
+              <a:lnSpc>
+                <a:spcPct val="120000"/>
+              </a:lnSpc>
+            </a:pPr>
+            <a:r>
+              <a:rPr sz="1400" b="1">
+                <a:solidFill>
+                  <a:srgbClr val="FFFFFF"/>
+                </a:solidFill>
+                <a:latin typeface="メイリオ"/>
+                <a:ea typeface="メイリオ"/>
+                <a:cs typeface="メイリオ"/>
+              </a:rPr>
+              <a:t>キャンセルを減らす</a:t>
+            </a:r>
+          </a:p>
+        </p:txBody>
+      </p:sp>
+      <p:sp>
+        <p:nvSpPr>
+          <p:cNvPr id="15" name="Rounded Rectangle 14"/>
+          <p:cNvSpPr/>
+          <p:nvPr/>
+        </p:nvSpPr>
+        <p:spPr>
+          <a:xfrm>
+            <a:off x="6523199" y="2215800"/>
+            <a:ext cx="2951999" cy="503999"/>
+          </a:xfrm>
+          <a:prstGeom prst="roundRect">
+            <a:avLst>
+              <a:gd name="adj" fmla="val 10000"/>
+            </a:avLst>
+          </a:prstGeom>
+          <a:solidFill>
+            <a:srgbClr val="1F285A"/>
+          </a:solidFill>
+          <a:ln>
+            <a:noFill/>
+          </a:ln>
+          <a:effectLst/>
+        </p:spPr>
+        <p:style>
+          <a:lnRef idx="1">
+            <a:schemeClr val="accent1"/>
+          </a:lnRef>
+          <a:fillRef idx="3">
+            <a:schemeClr val="accent1"/>
+          </a:fillRef>
+          <a:effectRef idx="2">
+            <a:schemeClr val="accent1"/>
+          </a:effectRef>
+          <a:fontRef idx="minor">
+            <a:schemeClr val="lt1"/>
+          </a:fontRef>
+        </p:style>
+        <p:txBody>
+          <a:bodyPr wrap="square" lIns="54000" tIns="18000" rIns="54000" bIns="18000" rtlCol="0" anchor="ctr"/>
+          <a:lstStyle/>
+          <a:p>
+            <a:pPr algn="ctr">
+              <a:lnSpc>
+                <a:spcPct val="120000"/>
+              </a:lnSpc>
+            </a:pPr>
+            <a:r>
+              <a:rPr sz="1400" b="1">
+                <a:solidFill>
+                  <a:srgbClr val="FFFFFF"/>
+                </a:solidFill>
+                <a:latin typeface="メイリオ"/>
+                <a:ea typeface="メイリオ"/>
+                <a:cs typeface="メイリオ"/>
+              </a:rPr>
+              <a:t>購入した方</a:t>
+            </a:r>
+          </a:p>
+        </p:txBody>
+      </p:sp>
+      <p:sp>
+        <p:nvSpPr>
+          <p:cNvPr id="16" name="Down Arrow 15"/>
+          <p:cNvSpPr/>
+          <p:nvPr/>
+        </p:nvSpPr>
+        <p:spPr>
+          <a:xfrm>
+            <a:off x="7783199" y="2773801"/>
+            <a:ext cx="432000" cy="251999"/>
+          </a:xfrm>
+          <a:prstGeom prst="downArrow">
+            <a:avLst/>
+          </a:prstGeom>
+          <a:solidFill>
+            <a:srgbClr val="1F285A"/>
+          </a:solidFill>
+          <a:ln>
+            <a:noFill/>
+          </a:ln>
+          <a:effectLst/>
+        </p:spPr>
+        <p:style>
+          <a:lnRef idx="1">
+            <a:schemeClr val="accent1"/>
+          </a:lnRef>
+          <a:fillRef idx="3">
+            <a:schemeClr val="accent1"/>
+          </a:fillRef>
+          <a:effectRef idx="2">
+            <a:schemeClr val="accent1"/>
+          </a:effectRef>
+          <a:fontRef idx="minor">
+            <a:schemeClr val="lt1"/>
+          </a:fontRef>
+        </p:style>
+        <p:txBody>
+          <a:bodyPr rtlCol="0" anchor="ctr"/>
+          <a:lstStyle/>
+          <a:p>
+            <a:pPr algn="ctr"/>
+            <a:endParaRPr/>
+          </a:p>
+        </p:txBody>
+      </p:sp>
+      <p:sp>
+        <p:nvSpPr>
+          <p:cNvPr id="17" name="Rounded Rectangle 16"/>
+          <p:cNvSpPr/>
+          <p:nvPr/>
+        </p:nvSpPr>
+        <p:spPr>
+          <a:xfrm>
+            <a:off x="6523199" y="3079801"/>
+            <a:ext cx="2951999" cy="648000"/>
+          </a:xfrm>
+          <a:prstGeom prst="roundRect">
+            <a:avLst>
+              <a:gd name="adj" fmla="val 10000"/>
+            </a:avLst>
+          </a:prstGeom>
+          <a:solidFill>
+            <a:srgbClr val="F4F7FF"/>
+          </a:solidFill>
+          <a:ln w="12700">
+            <a:solidFill>
+              <a:srgbClr val="D9D9D9"/>
+            </a:solidFill>
+          </a:ln>
+          <a:effectLst/>
+        </p:spPr>
+        <p:style>
+          <a:lnRef idx="1">
+            <a:schemeClr val="accent1"/>
+          </a:lnRef>
+          <a:fillRef idx="3">
+            <a:schemeClr val="accent1"/>
+          </a:fillRef>
+          <a:effectRef idx="2">
+            <a:schemeClr val="accent1"/>
+          </a:effectRef>
+          <a:fontRef idx="minor">
+            <a:schemeClr val="lt1"/>
+          </a:fontRef>
+        </p:style>
+        <p:txBody>
+          <a:bodyPr wrap="square" lIns="54000" tIns="18000" rIns="54000" bIns="18000" rtlCol="0" anchor="ctr"/>
+          <a:lstStyle/>
+          <a:p>
+            <a:pPr algn="ctr">
+              <a:lnSpc>
+                <a:spcPct val="120000"/>
+              </a:lnSpc>
+            </a:pPr>
+            <a:r>
+              <a:rPr sz="1300" b="1">
+                <a:solidFill>
+                  <a:srgbClr val="1F285A"/>
+                </a:solidFill>
+                <a:latin typeface="メイリオ"/>
+                <a:ea typeface="メイリオ"/>
+                <a:cs typeface="メイリオ"/>
+              </a:rPr>
+              <a:t>使い方・次回のご案内</a:t>
+            </a:r>
+          </a:p>
+        </p:txBody>
+      </p:sp>
+      <p:sp>
+        <p:nvSpPr>
+          <p:cNvPr id="18" name="Down Arrow 17"/>
+          <p:cNvSpPr/>
+          <p:nvPr/>
+        </p:nvSpPr>
+        <p:spPr>
+          <a:xfrm>
+            <a:off x="7783199" y="3781800"/>
+            <a:ext cx="432000" cy="251999"/>
+          </a:xfrm>
+          <a:prstGeom prst="downArrow">
+            <a:avLst/>
+          </a:prstGeom>
+          <a:solidFill>
+            <a:srgbClr val="06C755"/>
+          </a:solidFill>
+          <a:ln>
+            <a:noFill/>
+          </a:ln>
+          <a:effectLst/>
+        </p:spPr>
+        <p:style>
+          <a:lnRef idx="1">
+            <a:schemeClr val="accent1"/>
+          </a:lnRef>
+          <a:fillRef idx="3">
+            <a:schemeClr val="accent1"/>
+          </a:fillRef>
+          <a:effectRef idx="2">
+            <a:schemeClr val="accent1"/>
+          </a:effectRef>
+          <a:fontRef idx="minor">
+            <a:schemeClr val="lt1"/>
+          </a:fontRef>
+        </p:style>
+        <p:txBody>
+          <a:bodyPr rtlCol="0" anchor="ctr"/>
+          <a:lstStyle/>
+          <a:p>
+            <a:pPr algn="ctr"/>
+            <a:endParaRPr/>
+          </a:p>
+        </p:txBody>
+      </p:sp>
+      <p:sp>
+        <p:nvSpPr>
+          <p:cNvPr id="19" name="Rounded Rectangle 18"/>
+          <p:cNvSpPr/>
+          <p:nvPr/>
+        </p:nvSpPr>
+        <p:spPr>
+          <a:xfrm>
+            <a:off x="6523199" y="4087801"/>
+            <a:ext cx="2951999" cy="503999"/>
+          </a:xfrm>
+          <a:prstGeom prst="roundRect">
+            <a:avLst>
+              <a:gd name="adj" fmla="val 10000"/>
+            </a:avLst>
+          </a:prstGeom>
+          <a:solidFill>
+            <a:srgbClr val="06C755"/>
+          </a:solidFill>
+          <a:ln>
+            <a:noFill/>
+          </a:ln>
+          <a:effectLst/>
+        </p:spPr>
+        <p:style>
+          <a:lnRef idx="1">
+            <a:schemeClr val="accent1"/>
+          </a:lnRef>
+          <a:fillRef idx="3">
+            <a:schemeClr val="accent1"/>
+          </a:fillRef>
+          <a:effectRef idx="2">
+            <a:schemeClr val="accent1"/>
+          </a:effectRef>
+          <a:fontRef idx="minor">
+            <a:schemeClr val="lt1"/>
+          </a:fontRef>
+        </p:style>
+        <p:txBody>
+          <a:bodyPr wrap="square" lIns="54000" tIns="18000" rIns="54000" bIns="18000" rtlCol="0" anchor="ctr"/>
+          <a:lstStyle/>
+          <a:p>
+            <a:pPr algn="ctr">
+              <a:lnSpc>
+                <a:spcPct val="120000"/>
+              </a:lnSpc>
+            </a:pPr>
+            <a:r>
+              <a:rPr sz="1400" b="1" dirty="0" err="1">
+                <a:solidFill>
+                  <a:srgbClr val="FFFFFF"/>
+                </a:solidFill>
+                <a:latin typeface="メイリオ"/>
+                <a:ea typeface="メイリオ"/>
+                <a:cs typeface="メイリオ"/>
+              </a:rPr>
+              <a:t>リピートへ</a:t>
+            </a:r>
+            <a:r>
+              <a:rPr lang="ja-JP" altLang="en-US" sz="1400" b="1" dirty="0">
+                <a:solidFill>
+                  <a:srgbClr val="FFFFFF"/>
+                </a:solidFill>
+                <a:latin typeface="メイリオ"/>
+                <a:ea typeface="メイリオ"/>
+                <a:cs typeface="メイリオ"/>
+              </a:rPr>
+              <a:t>（</a:t>
+            </a:r>
+            <a:r>
+              <a:rPr lang="en-US" altLang="ja-JP" sz="1400" b="1" dirty="0">
+                <a:solidFill>
+                  <a:srgbClr val="FFFFFF"/>
+                </a:solidFill>
+                <a:latin typeface="メイリオ"/>
+                <a:ea typeface="メイリオ"/>
+                <a:cs typeface="メイリオ"/>
+              </a:rPr>
+              <a:t>LTV</a:t>
+            </a:r>
+            <a:r>
+              <a:rPr lang="ja-JP" altLang="en-US" sz="1400" b="1" dirty="0">
+                <a:solidFill>
+                  <a:srgbClr val="FFFFFF"/>
+                </a:solidFill>
+                <a:latin typeface="メイリオ"/>
+                <a:ea typeface="メイリオ"/>
+                <a:cs typeface="メイリオ"/>
+              </a:rPr>
+              <a:t>）</a:t>
+            </a:r>
+            <a:endParaRPr sz="1400" b="1" dirty="0">
+              <a:solidFill>
+                <a:srgbClr val="FFFFFF"/>
+              </a:solidFill>
+              <a:latin typeface="メイリオ"/>
+              <a:ea typeface="メイリオ"/>
+              <a:cs typeface="メイリオ"/>
+            </a:endParaRPr>
+          </a:p>
+        </p:txBody>
+      </p:sp>
+      <p:sp>
+        <p:nvSpPr>
+          <p:cNvPr id="20" name="Rounded Rectangle 19"/>
+          <p:cNvSpPr/>
+          <p:nvPr/>
+        </p:nvSpPr>
+        <p:spPr>
+          <a:xfrm>
+            <a:off x="432000" y="4951801"/>
+            <a:ext cx="9043200" cy="503999"/>
+          </a:xfrm>
+          <a:prstGeom prst="roundRect">
+            <a:avLst>
+              <a:gd name="adj" fmla="val 10000"/>
+            </a:avLst>
+          </a:prstGeom>
+          <a:solidFill>
+            <a:srgbClr val="1F285A"/>
+          </a:solidFill>
+          <a:ln>
+            <a:noFill/>
+          </a:ln>
+          <a:effectLst/>
+        </p:spPr>
+        <p:style>
+          <a:lnRef idx="1">
+            <a:schemeClr val="accent1"/>
+          </a:lnRef>
+          <a:fillRef idx="3">
+            <a:schemeClr val="accent1"/>
+          </a:fillRef>
+          <a:effectRef idx="2">
+            <a:schemeClr val="accent1"/>
+          </a:effectRef>
+          <a:fontRef idx="minor">
+            <a:schemeClr val="lt1"/>
+          </a:fontRef>
+        </p:style>
+        <p:txBody>
+          <a:bodyPr wrap="square" lIns="108000" tIns="0" rIns="108000" bIns="0" rtlCol="0" anchor="ctr"/>
+          <a:lstStyle/>
+          <a:p>
+            <a:pPr algn="ctr">
+              <a:lnSpc>
+                <a:spcPct val="125000"/>
+              </a:lnSpc>
+            </a:pPr>
+            <a:r>
+              <a:rPr sz="1400" b="1">
+                <a:solidFill>
+                  <a:srgbClr val="FFFFFF"/>
+                </a:solidFill>
+                <a:latin typeface="メイリオ"/>
+                <a:ea typeface="メイリオ"/>
+                <a:cs typeface="メイリオ"/>
+              </a:rPr>
+              <a:t>弊社実績：美容クリニックで、予約後の来院率が40〜50%改善</a:t>
+            </a:r>
+          </a:p>
+        </p:txBody>
+      </p:sp>
+    </p:spTree>
+    <p:extLst>
+      <p:ext uri="{BB962C8B-B14F-4D97-AF65-F5344CB8AC3E}">
+        <p14:creationId xmlns:p14="http://schemas.microsoft.com/office/powerpoint/2010/main" val="3939997984"/>
       </p:ext>
     </p:extLst>
   </p:cSld>
@@ -4787,7 +6180,7 @@
           <a:noFill/>
         </p:spPr>
         <p:txBody>
-          <a:bodyPr wrap="square" lIns="0" rIns="0" tIns="21600" bIns="21600" anchor="ctr">
+          <a:bodyPr wrap="square" lIns="0" tIns="21600" rIns="0" bIns="21600" anchor="ctr">
             <a:spAutoFit/>
           </a:bodyPr>
           <a:lstStyle/>
@@ -4802,7 +6195,7 @@
                 <a:ea typeface="メイリオ"/>
                 <a:cs typeface="メイリオ"/>
               </a:rPr>
-              <a:t>LINEで、成果まで育てる</a:t>
+              <a:t>広告は「申込みの数」、LINEは「売上」をつくる</a:t>
             </a:r>
           </a:p>
         </p:txBody>
@@ -4815,8 +6208,8 @@
         </p:nvSpPr>
         <p:spPr>
           <a:xfrm>
-            <a:off x="432000" y="648000"/>
-            <a:ext cx="9036000" cy="684000"/>
+            <a:off x="432000" y="836230"/>
+            <a:ext cx="9036000" cy="307540"/>
           </a:xfrm>
           <a:prstGeom prst="rect">
             <a:avLst/>
@@ -4824,7 +6217,7 @@
           <a:noFill/>
         </p:spPr>
         <p:txBody>
-          <a:bodyPr wrap="square" lIns="0" rIns="0" tIns="21600" bIns="21600" anchor="ctr">
+          <a:bodyPr wrap="square" lIns="0" tIns="21600" rIns="0" bIns="21600" anchor="ctr">
             <a:spAutoFit/>
           </a:bodyPr>
           <a:lstStyle/>
@@ -4835,7 +6228,7 @@
               </a:lnSpc>
             </a:pPr>
             <a:r>
-              <a:rPr sz="1250">
+              <a:rPr sz="1400" dirty="0" err="1">
                 <a:solidFill>
                   <a:srgbClr val="333333"/>
                 </a:solidFill>
@@ -4843,8 +6236,27 @@
                 <a:ea typeface="メイリオ"/>
                 <a:cs typeface="メイリオ"/>
               </a:rPr>
-              <a:t>申込んだ方に合わせて、LINEで次の一歩を後押しします。</a:t>
-            </a:r>
+              <a:t>同じ広告費のまま、申込みの「後」を伸ばして成約</a:t>
+            </a:r>
+            <a:r>
+              <a:rPr lang="ja-JP" altLang="en-US" sz="1400" dirty="0">
+                <a:solidFill>
+                  <a:srgbClr val="333333"/>
+                </a:solidFill>
+                <a:latin typeface="メイリオ"/>
+                <a:ea typeface="メイリオ"/>
+                <a:cs typeface="メイリオ"/>
+              </a:rPr>
+              <a:t>数増加へ</a:t>
+            </a:r>
+            <a:endParaRPr sz="1400" dirty="0">
+              <a:solidFill>
+                <a:srgbClr val="333333"/>
+              </a:solidFill>
+              <a:latin typeface="メイリオ"/>
+              <a:ea typeface="メイリオ"/>
+              <a:cs typeface="メイリオ"/>
+            </a:endParaRPr>
           </a:p>
         </p:txBody>
       </p:sp>
@@ -4891,12 +6303,12 @@
         </p:nvSpPr>
         <p:spPr>
           <a:xfrm>
-            <a:off x="432000" y="2215800"/>
-            <a:ext cx="2951999" cy="503999"/>
+            <a:off x="1584000" y="2287800"/>
+            <a:ext cx="3204000" cy="270000"/>
           </a:xfrm>
           <a:prstGeom prst="roundRect">
             <a:avLst>
-              <a:gd name="adj" fmla="val 10000"/>
+              <a:gd name="adj" fmla="val 18000"/>
             </a:avLst>
           </a:prstGeom>
           <a:solidFill>
@@ -4922,7 +6334,121 @@
           </a:fontRef>
         </p:style>
         <p:txBody>
-          <a:bodyPr rtlCol="0" anchor="ctr" wrap="square" lIns="54000" rIns="54000" tIns="18000" bIns="18000"/>
+          <a:bodyPr wrap="square" lIns="36000" tIns="0" rIns="36000" bIns="0" rtlCol="0" anchor="ctr"/>
+          <a:lstStyle/>
+          <a:p>
+            <a:pPr algn="ctr"/>
+            <a:r>
+              <a:rPr sz="1100" b="1">
+                <a:solidFill>
+                  <a:srgbClr val="FFFFFF"/>
+                </a:solidFill>
+                <a:latin typeface="メイリオ"/>
+                <a:ea typeface="メイリオ"/>
+                <a:cs typeface="メイリオ"/>
+              </a:rPr>
+              <a:t>広告の役割：申込みを集める</a:t>
+            </a:r>
+          </a:p>
+        </p:txBody>
+      </p:sp>
+      <p:sp>
+        <p:nvSpPr>
+          <p:cNvPr id="6" name="Rounded Rectangle 5"/>
+          <p:cNvSpPr/>
+          <p:nvPr/>
+        </p:nvSpPr>
+        <p:spPr>
+          <a:xfrm>
+            <a:off x="4896000" y="2287800"/>
+            <a:ext cx="4579200" cy="270000"/>
+          </a:xfrm>
+          <a:prstGeom prst="roundRect">
+            <a:avLst>
+              <a:gd name="adj" fmla="val 18000"/>
+            </a:avLst>
+          </a:prstGeom>
+          <a:solidFill>
+            <a:srgbClr val="06C755"/>
+          </a:solidFill>
+          <a:ln>
+            <a:noFill/>
+          </a:ln>
+          <a:effectLst/>
+        </p:spPr>
+        <p:style>
+          <a:lnRef idx="1">
+            <a:schemeClr val="accent1"/>
+          </a:lnRef>
+          <a:fillRef idx="3">
+            <a:schemeClr val="accent1"/>
+          </a:fillRef>
+          <a:effectRef idx="2">
+            <a:schemeClr val="accent1"/>
+          </a:effectRef>
+          <a:fontRef idx="minor">
+            <a:schemeClr val="lt1"/>
+          </a:fontRef>
+        </p:style>
+        <p:txBody>
+          <a:bodyPr wrap="square" lIns="36000" tIns="0" rIns="36000" bIns="0" rtlCol="0" anchor="ctr"/>
+          <a:lstStyle/>
+          <a:p>
+            <a:pPr algn="ctr"/>
+            <a:r>
+              <a:rPr sz="1100" b="1">
+                <a:solidFill>
+                  <a:srgbClr val="FFFFFF"/>
+                </a:solidFill>
+                <a:latin typeface="メイリオ"/>
+                <a:ea typeface="メイリオ"/>
+                <a:cs typeface="メイリオ"/>
+              </a:rPr>
+              <a:t>LINEの役割：申込んだ方を売上へ</a:t>
+            </a:r>
+          </a:p>
+        </p:txBody>
+      </p:sp>
+      <p:sp>
+        <p:nvSpPr>
+          <p:cNvPr id="7" name="Rounded Rectangle 6"/>
+          <p:cNvSpPr/>
+          <p:nvPr/>
+        </p:nvSpPr>
+        <p:spPr>
+          <a:xfrm>
+            <a:off x="432000" y="2683800"/>
+            <a:ext cx="1044000" cy="864000"/>
+          </a:xfrm>
+          <a:prstGeom prst="roundRect">
+            <a:avLst>
+              <a:gd name="adj" fmla="val 10000"/>
+            </a:avLst>
+          </a:prstGeom>
+          <a:solidFill>
+            <a:srgbClr val="EDEDED"/>
+          </a:solidFill>
+          <a:ln>
+            <a:noFill/>
+          </a:ln>
+          <a:effectLst/>
+        </p:spPr>
+        <p:style>
+          <a:lnRef idx="1">
+            <a:schemeClr val="accent1"/>
+          </a:lnRef>
+          <a:fillRef idx="3">
+            <a:schemeClr val="accent1"/>
+          </a:fillRef>
+          <a:effectRef idx="2">
+            <a:schemeClr val="accent1"/>
+          </a:effectRef>
+          <a:fontRef idx="minor">
+            <a:schemeClr val="lt1"/>
+          </a:fontRef>
+        </p:style>
+        <p:txBody>
+          <a:bodyPr wrap="square" lIns="54000" tIns="18000" rIns="54000" bIns="18000" rtlCol="0" anchor="ctr"/>
           <a:lstStyle/>
           <a:p>
             <a:pPr algn="ctr">
@@ -4931,73 +6457,29 @@
               </a:lnSpc>
             </a:pPr>
             <a:r>
-              <a:rPr sz="1400" b="1">
-                <a:solidFill>
-                  <a:srgbClr val="FFFFFF"/>
-                </a:solidFill>
-                <a:latin typeface="メイリオ"/>
-                <a:ea typeface="メイリオ"/>
-                <a:cs typeface="メイリオ"/>
-              </a:rPr>
-              <a:t>資料請求した方</a:t>
-            </a:r>
-          </a:p>
-        </p:txBody>
-      </p:sp>
-      <p:sp>
-        <p:nvSpPr>
-          <p:cNvPr id="6" name="Down Arrow 5"/>
+              <a:rPr sz="1200" b="1">
+                <a:solidFill>
+                  <a:srgbClr val="7F7F7F"/>
+                </a:solidFill>
+                <a:latin typeface="メイリオ"/>
+                <a:ea typeface="メイリオ"/>
+                <a:cs typeface="メイリオ"/>
+              </a:rPr>
+              <a:t>広告だけ</a:t>
+            </a:r>
+          </a:p>
+        </p:txBody>
+      </p:sp>
+      <p:sp>
+        <p:nvSpPr>
+          <p:cNvPr id="8" name="Rounded Rectangle 7"/>
           <p:cNvSpPr/>
           <p:nvPr/>
         </p:nvSpPr>
         <p:spPr>
           <a:xfrm>
-            <a:off x="1692000" y="2773801"/>
-            <a:ext cx="432000" cy="251999"/>
-          </a:xfrm>
-          <a:prstGeom prst="downArrow">
-            <a:avLst/>
-          </a:prstGeom>
-          <a:solidFill>
-            <a:srgbClr val="1F285A"/>
-          </a:solidFill>
-          <a:ln>
-            <a:noFill/>
-          </a:ln>
-          <a:effectLst/>
-        </p:spPr>
-        <p:style>
-          <a:lnRef idx="1">
-            <a:schemeClr val="accent1"/>
-          </a:lnRef>
-          <a:fillRef idx="3">
-            <a:schemeClr val="accent1"/>
-          </a:fillRef>
-          <a:effectRef idx="2">
-            <a:schemeClr val="accent1"/>
-          </a:effectRef>
-          <a:fontRef idx="minor">
-            <a:schemeClr val="lt1"/>
-          </a:fontRef>
-        </p:style>
-        <p:txBody>
-          <a:bodyPr rtlCol="0" anchor="ctr"/>
-          <a:lstStyle/>
-          <a:p>
-            <a:pPr algn="ctr"/>
-          </a:p>
-        </p:txBody>
-      </p:sp>
-      <p:sp>
-        <p:nvSpPr>
-          <p:cNvPr id="7" name="Rounded Rectangle 6"/>
-          <p:cNvSpPr/>
-          <p:nvPr/>
-        </p:nvSpPr>
-        <p:spPr>
-          <a:xfrm>
-            <a:off x="432000" y="3079801"/>
-            <a:ext cx="2951999" cy="648000"/>
+            <a:off x="1584000" y="2683800"/>
+            <a:ext cx="3204000" cy="864000"/>
           </a:xfrm>
           <a:prstGeom prst="roundRect">
             <a:avLst>
@@ -5029,7 +6511,7 @@
           </a:fontRef>
         </p:style>
         <p:txBody>
-          <a:bodyPr rtlCol="0" anchor="ctr" wrap="square" lIns="54000" rIns="54000" tIns="18000" bIns="18000"/>
+          <a:bodyPr wrap="square" lIns="54000" tIns="18000" rIns="54000" bIns="18000" rtlCol="0" anchor="ctr"/>
           <a:lstStyle/>
           <a:p>
             <a:pPr algn="ctr">
@@ -5038,7 +6520,7 @@
               </a:lnSpc>
             </a:pPr>
             <a:r>
-              <a:rPr sz="1300" b="1">
+              <a:rPr sz="1400" b="1">
                 <a:solidFill>
                   <a:srgbClr val="1F285A"/>
                 </a:solidFill>
@@ -5046,27 +6528,45 @@
                 <a:ea typeface="メイリオ"/>
                 <a:cs typeface="メイリオ"/>
               </a:rPr>
-              <a:t>比較のポイント・事例</a:t>
-            </a:r>
-          </a:p>
-        </p:txBody>
-      </p:sp>
-      <p:sp>
-        <p:nvSpPr>
-          <p:cNvPr id="8" name="Down Arrow 7"/>
+              <a:t>申込み 100件</a:t>
+            </a:r>
+          </a:p>
+          <a:p>
+            <a:pPr algn="ctr">
+              <a:lnSpc>
+                <a:spcPct val="120000"/>
+              </a:lnSpc>
+            </a:pPr>
+            <a:r>
+              <a:rPr sz="1200" b="0">
+                <a:solidFill>
+                  <a:srgbClr val="1F285A"/>
+                </a:solidFill>
+                <a:latin typeface="メイリオ"/>
+                <a:ea typeface="メイリオ"/>
+                <a:cs typeface="メイリオ"/>
+              </a:rPr>
+              <a:t>広告費 月100万円</a:t>
+            </a:r>
+          </a:p>
+        </p:txBody>
+      </p:sp>
+      <p:sp>
+        <p:nvSpPr>
+          <p:cNvPr id="9" name="Right Arrow 8"/>
           <p:cNvSpPr/>
           <p:nvPr/>
         </p:nvSpPr>
         <p:spPr>
           <a:xfrm>
-            <a:off x="1692000" y="3781800"/>
-            <a:ext cx="432000" cy="251999"/>
-          </a:xfrm>
-          <a:prstGeom prst="downArrow">
+            <a:off x="4860000" y="2953800"/>
+            <a:ext cx="288000" cy="324000"/>
+          </a:xfrm>
+          <a:prstGeom prst="rightArrow">
             <a:avLst/>
           </a:prstGeom>
           <a:solidFill>
-            <a:srgbClr val="06C755"/>
+            <a:srgbClr val="7F7F7F"/>
           </a:solidFill>
           <a:ln>
             <a:noFill/>
@@ -5092,19 +6592,20 @@
           <a:lstStyle/>
           <a:p>
             <a:pPr algn="ctr"/>
-          </a:p>
-        </p:txBody>
-      </p:sp>
-      <p:sp>
-        <p:nvSpPr>
-          <p:cNvPr id="9" name="Rounded Rectangle 8"/>
+            <a:endParaRPr/>
+          </a:p>
+        </p:txBody>
+      </p:sp>
+      <p:sp>
+        <p:nvSpPr>
+          <p:cNvPr id="10" name="Rounded Rectangle 9"/>
           <p:cNvSpPr/>
           <p:nvPr/>
         </p:nvSpPr>
         <p:spPr>
           <a:xfrm>
-            <a:off x="432000" y="4087801"/>
-            <a:ext cx="2951999" cy="503999"/>
+            <a:off x="5220000" y="2683800"/>
+            <a:ext cx="1944000" cy="864000"/>
           </a:xfrm>
           <a:prstGeom prst="roundRect">
             <a:avLst>
@@ -5112,10 +6613,13 @@
             </a:avLst>
           </a:prstGeom>
           <a:solidFill>
-            <a:srgbClr val="06C755"/>
-          </a:solidFill>
-          <a:ln>
-            <a:noFill/>
+            <a:srgbClr val="FFFFFF"/>
+          </a:solidFill>
+          <a:ln w="19050">
+            <a:solidFill>
+              <a:srgbClr val="7F7F7F"/>
+            </a:solidFill>
+            <a:prstDash val="dash"/>
           </a:ln>
           <a:effectLst/>
         </p:spPr>
@@ -5134,7 +6638,7 @@
           </a:fontRef>
         </p:style>
         <p:txBody>
-          <a:bodyPr rtlCol="0" anchor="ctr" wrap="square" lIns="54000" rIns="54000" tIns="18000" bIns="18000"/>
+          <a:bodyPr wrap="square" lIns="54000" tIns="18000" rIns="54000" bIns="18000" rtlCol="0" anchor="ctr"/>
           <a:lstStyle/>
           <a:p>
             <a:pPr algn="ctr">
@@ -5143,37 +6647,35 @@
               </a:lnSpc>
             </a:pPr>
             <a:r>
-              <a:rPr sz="1400" b="1">
-                <a:solidFill>
-                  <a:srgbClr val="FFFFFF"/>
-                </a:solidFill>
-                <a:latin typeface="メイリオ"/>
-                <a:ea typeface="メイリオ"/>
-                <a:cs typeface="メイリオ"/>
-              </a:rPr>
-              <a:t>来店・商談へ</a:t>
-            </a:r>
-          </a:p>
-        </p:txBody>
-      </p:sp>
-      <p:sp>
-        <p:nvSpPr>
-          <p:cNvPr id="10" name="Rounded Rectangle 9"/>
+              <a:rPr sz="1300" b="1">
+                <a:solidFill>
+                  <a:srgbClr val="7F7F7F"/>
+                </a:solidFill>
+                <a:latin typeface="メイリオ"/>
+                <a:ea typeface="メイリオ"/>
+                <a:cs typeface="メイリオ"/>
+              </a:rPr>
+              <a:t>メール・電話</a:t>
+            </a:r>
+          </a:p>
+        </p:txBody>
+      </p:sp>
+      <p:sp>
+        <p:nvSpPr>
+          <p:cNvPr id="11" name="Right Arrow 10"/>
           <p:cNvSpPr/>
           <p:nvPr/>
         </p:nvSpPr>
         <p:spPr>
           <a:xfrm>
-            <a:off x="3477599" y="2215800"/>
-            <a:ext cx="2951999" cy="503999"/>
-          </a:xfrm>
-          <a:prstGeom prst="roundRect">
-            <a:avLst>
-              <a:gd name="adj" fmla="val 10000"/>
-            </a:avLst>
-          </a:prstGeom>
-          <a:solidFill>
-            <a:srgbClr val="1F285A"/>
+            <a:off x="7236000" y="2953800"/>
+            <a:ext cx="288000" cy="324000"/>
+          </a:xfrm>
+          <a:prstGeom prst="rightArrow">
+            <a:avLst/>
+          </a:prstGeom>
+          <a:solidFill>
+            <a:srgbClr val="7F7F7F"/>
           </a:solidFill>
           <a:ln>
             <a:noFill/>
@@ -5195,7 +6697,54 @@
           </a:fontRef>
         </p:style>
         <p:txBody>
-          <a:bodyPr rtlCol="0" anchor="ctr" wrap="square" lIns="54000" rIns="54000" tIns="18000" bIns="18000"/>
+          <a:bodyPr rtlCol="0" anchor="ctr"/>
+          <a:lstStyle/>
+          <a:p>
+            <a:pPr algn="ctr"/>
+            <a:endParaRPr/>
+          </a:p>
+        </p:txBody>
+      </p:sp>
+      <p:sp>
+        <p:nvSpPr>
+          <p:cNvPr id="12" name="Rounded Rectangle 11"/>
+          <p:cNvSpPr/>
+          <p:nvPr/>
+        </p:nvSpPr>
+        <p:spPr>
+          <a:xfrm>
+            <a:off x="7596000" y="2683800"/>
+            <a:ext cx="1879200" cy="864000"/>
+          </a:xfrm>
+          <a:prstGeom prst="roundRect">
+            <a:avLst>
+              <a:gd name="adj" fmla="val 10000"/>
+            </a:avLst>
+          </a:prstGeom>
+          <a:solidFill>
+            <a:srgbClr val="EDEDED"/>
+          </a:solidFill>
+          <a:ln>
+            <a:noFill/>
+          </a:ln>
+          <a:effectLst/>
+        </p:spPr>
+        <p:style>
+          <a:lnRef idx="1">
+            <a:schemeClr val="accent1"/>
+          </a:lnRef>
+          <a:fillRef idx="3">
+            <a:schemeClr val="accent1"/>
+          </a:fillRef>
+          <a:effectRef idx="2">
+            <a:schemeClr val="accent1"/>
+          </a:effectRef>
+          <a:fontRef idx="minor">
+            <a:schemeClr val="lt1"/>
+          </a:fontRef>
+        </p:style>
+        <p:txBody>
+          <a:bodyPr wrap="square" lIns="54000" tIns="18000" rIns="54000" bIns="18000" rtlCol="0" anchor="ctr"/>
           <a:lstStyle/>
           <a:p>
             <a:pPr algn="ctr">
@@ -5204,35 +6753,55 @@
               </a:lnSpc>
             </a:pPr>
             <a:r>
-              <a:rPr sz="1400" b="1">
-                <a:solidFill>
-                  <a:srgbClr val="FFFFFF"/>
-                </a:solidFill>
-                <a:latin typeface="メイリオ"/>
-                <a:ea typeface="メイリオ"/>
-                <a:cs typeface="メイリオ"/>
-              </a:rPr>
-              <a:t>予約した方</a:t>
-            </a:r>
-          </a:p>
-        </p:txBody>
-      </p:sp>
-      <p:sp>
-        <p:nvSpPr>
-          <p:cNvPr id="11" name="Down Arrow 10"/>
+              <a:rPr sz="1500" b="1">
+                <a:solidFill>
+                  <a:srgbClr val="333333"/>
+                </a:solidFill>
+                <a:latin typeface="メイリオ"/>
+                <a:ea typeface="メイリオ"/>
+                <a:cs typeface="メイリオ"/>
+              </a:rPr>
+              <a:t>成約 20件</a:t>
+            </a:r>
+          </a:p>
+          <a:p>
+            <a:pPr algn="ctr">
+              <a:lnSpc>
+                <a:spcPct val="120000"/>
+              </a:lnSpc>
+            </a:pPr>
+            <a:r>
+              <a:rPr sz="1300" b="0">
+                <a:solidFill>
+                  <a:srgbClr val="333333"/>
+                </a:solidFill>
+                <a:latin typeface="メイリオ"/>
+                <a:ea typeface="メイリオ"/>
+                <a:cs typeface="メイリオ"/>
+              </a:rPr>
+              <a:t>1件あたり 5.0万円</a:t>
+            </a:r>
+          </a:p>
+        </p:txBody>
+      </p:sp>
+      <p:sp>
+        <p:nvSpPr>
+          <p:cNvPr id="13" name="Rounded Rectangle 12"/>
           <p:cNvSpPr/>
           <p:nvPr/>
         </p:nvSpPr>
         <p:spPr>
           <a:xfrm>
-            <a:off x="4737599" y="2773801"/>
-            <a:ext cx="432000" cy="251999"/>
-          </a:xfrm>
-          <a:prstGeom prst="downArrow">
-            <a:avLst/>
-          </a:prstGeom>
-          <a:solidFill>
-            <a:srgbClr val="1F285A"/>
+            <a:off x="432000" y="3727800"/>
+            <a:ext cx="1044000" cy="864000"/>
+          </a:xfrm>
+          <a:prstGeom prst="roundRect">
+            <a:avLst>
+              <a:gd name="adj" fmla="val 10000"/>
+            </a:avLst>
+          </a:prstGeom>
+          <a:solidFill>
+            <a:srgbClr val="06C755"/>
           </a:solidFill>
           <a:ln>
             <a:noFill/>
@@ -5254,23 +6823,56 @@
           </a:fontRef>
         </p:style>
         <p:txBody>
-          <a:bodyPr rtlCol="0" anchor="ctr"/>
+          <a:bodyPr wrap="square" lIns="54000" tIns="18000" rIns="54000" bIns="18000" rtlCol="0" anchor="ctr"/>
           <a:lstStyle/>
           <a:p>
-            <a:pPr algn="ctr"/>
-          </a:p>
-        </p:txBody>
-      </p:sp>
-      <p:sp>
-        <p:nvSpPr>
-          <p:cNvPr id="12" name="Rounded Rectangle 11"/>
+            <a:pPr algn="ctr">
+              <a:lnSpc>
+                <a:spcPct val="120000"/>
+              </a:lnSpc>
+            </a:pPr>
+            <a:r>
+              <a:rPr sz="1200" b="1">
+                <a:solidFill>
+                  <a:srgbClr val="FFFFFF"/>
+                </a:solidFill>
+                <a:latin typeface="メイリオ"/>
+                <a:ea typeface="メイリオ"/>
+                <a:cs typeface="メイリオ"/>
+              </a:rPr>
+              <a:t>広告</a:t>
+            </a:r>
+          </a:p>
+          <a:p>
+            <a:pPr algn="ctr">
+              <a:lnSpc>
+                <a:spcPct val="120000"/>
+              </a:lnSpc>
+            </a:pPr>
+            <a:r>
+              <a:rPr sz="1000" b="0">
+                <a:solidFill>
+                  <a:srgbClr val="FFFFFF"/>
+                </a:solidFill>
+                <a:latin typeface="メイリオ"/>
+                <a:ea typeface="メイリオ"/>
+                <a:cs typeface="メイリオ"/>
+              </a:rPr>
+              <a:t>＋LINE</a:t>
+            </a:r>
+          </a:p>
+        </p:txBody>
+      </p:sp>
+      <p:sp>
+        <p:nvSpPr>
+          <p:cNvPr id="14" name="Rounded Rectangle 13"/>
           <p:cNvSpPr/>
           <p:nvPr/>
         </p:nvSpPr>
         <p:spPr>
           <a:xfrm>
-            <a:off x="3477599" y="3079801"/>
-            <a:ext cx="2951999" cy="648000"/>
+            <a:off x="1584000" y="3727800"/>
+            <a:ext cx="3204000" cy="864000"/>
           </a:xfrm>
           <a:prstGeom prst="roundRect">
             <a:avLst>
@@ -5302,7 +6904,7 @@
           </a:fontRef>
         </p:style>
         <p:txBody>
-          <a:bodyPr rtlCol="0" anchor="ctr" wrap="square" lIns="54000" rIns="54000" tIns="18000" bIns="18000"/>
+          <a:bodyPr wrap="square" lIns="54000" tIns="18000" rIns="54000" bIns="18000" rtlCol="0" anchor="ctr"/>
           <a:lstStyle/>
           <a:p>
             <a:pPr algn="ctr">
@@ -5311,7 +6913,7 @@
               </a:lnSpc>
             </a:pPr>
             <a:r>
-              <a:rPr sz="1300" b="1">
+              <a:rPr sz="1400" b="1">
                 <a:solidFill>
                   <a:srgbClr val="1F285A"/>
                 </a:solidFill>
@@ -5319,23 +6921,41 @@
                 <a:ea typeface="メイリオ"/>
                 <a:cs typeface="メイリオ"/>
               </a:rPr>
-              <a:t>前日・当日のリマインド</a:t>
-            </a:r>
-          </a:p>
-        </p:txBody>
-      </p:sp>
-      <p:sp>
-        <p:nvSpPr>
-          <p:cNvPr id="13" name="Down Arrow 12"/>
+              <a:t>申込み 100件</a:t>
+            </a:r>
+          </a:p>
+          <a:p>
+            <a:pPr algn="ctr">
+              <a:lnSpc>
+                <a:spcPct val="120000"/>
+              </a:lnSpc>
+            </a:pPr>
+            <a:r>
+              <a:rPr sz="1200" b="0">
+                <a:solidFill>
+                  <a:srgbClr val="1F285A"/>
+                </a:solidFill>
+                <a:latin typeface="メイリオ"/>
+                <a:ea typeface="メイリオ"/>
+                <a:cs typeface="メイリオ"/>
+              </a:rPr>
+              <a:t>広告費 月100万円</a:t>
+            </a:r>
+          </a:p>
+        </p:txBody>
+      </p:sp>
+      <p:sp>
+        <p:nvSpPr>
+          <p:cNvPr id="15" name="Right Arrow 14"/>
           <p:cNvSpPr/>
           <p:nvPr/>
         </p:nvSpPr>
         <p:spPr>
           <a:xfrm>
-            <a:off x="4737599" y="3781800"/>
-            <a:ext cx="432000" cy="251999"/>
-          </a:xfrm>
-          <a:prstGeom prst="downArrow">
+            <a:off x="4860000" y="3997800"/>
+            <a:ext cx="288000" cy="324000"/>
+          </a:xfrm>
+          <a:prstGeom prst="rightArrow">
             <a:avLst/>
           </a:prstGeom>
           <a:solidFill>
@@ -5365,19 +6985,20 @@
           <a:lstStyle/>
           <a:p>
             <a:pPr algn="ctr"/>
-          </a:p>
-        </p:txBody>
-      </p:sp>
-      <p:sp>
-        <p:nvSpPr>
-          <p:cNvPr id="14" name="Rounded Rectangle 13"/>
+            <a:endParaRPr/>
+          </a:p>
+        </p:txBody>
+      </p:sp>
+      <p:sp>
+        <p:nvSpPr>
+          <p:cNvPr id="16" name="Rounded Rectangle 15"/>
           <p:cNvSpPr/>
           <p:nvPr/>
         </p:nvSpPr>
         <p:spPr>
           <a:xfrm>
-            <a:off x="3477599" y="4087801"/>
-            <a:ext cx="2951999" cy="503999"/>
+            <a:off x="5220000" y="3727800"/>
+            <a:ext cx="1944000" cy="864000"/>
           </a:xfrm>
           <a:prstGeom prst="roundRect">
             <a:avLst>
@@ -5385,10 +7006,12 @@
             </a:avLst>
           </a:prstGeom>
           <a:solidFill>
-            <a:srgbClr val="06C755"/>
-          </a:solidFill>
-          <a:ln>
-            <a:noFill/>
+            <a:srgbClr val="E8F8EE"/>
+          </a:solidFill>
+          <a:ln w="19050">
+            <a:solidFill>
+              <a:srgbClr val="06C755"/>
+            </a:solidFill>
           </a:ln>
           <a:effectLst/>
         </p:spPr>
@@ -5407,7 +7030,7 @@
           </a:fontRef>
         </p:style>
         <p:txBody>
-          <a:bodyPr rtlCol="0" anchor="ctr" wrap="square" lIns="54000" rIns="54000" tIns="18000" bIns="18000"/>
+          <a:bodyPr wrap="square" lIns="54000" tIns="18000" rIns="54000" bIns="18000" rtlCol="0" anchor="ctr"/>
           <a:lstStyle/>
           <a:p>
             <a:pPr algn="ctr">
@@ -5416,37 +7039,35 @@
               </a:lnSpc>
             </a:pPr>
             <a:r>
-              <a:rPr sz="1400" b="1">
-                <a:solidFill>
-                  <a:srgbClr val="FFFFFF"/>
-                </a:solidFill>
-                <a:latin typeface="メイリオ"/>
-                <a:ea typeface="メイリオ"/>
-                <a:cs typeface="メイリオ"/>
-              </a:rPr>
-              <a:t>キャンセルを減らす</a:t>
-            </a:r>
-          </a:p>
-        </p:txBody>
-      </p:sp>
-      <p:sp>
-        <p:nvSpPr>
-          <p:cNvPr id="15" name="Rounded Rectangle 14"/>
+              <a:rPr sz="1300" b="1">
+                <a:solidFill>
+                  <a:srgbClr val="0B7A3B"/>
+                </a:solidFill>
+                <a:latin typeface="メイリオ"/>
+                <a:ea typeface="メイリオ"/>
+                <a:cs typeface="メイリオ"/>
+              </a:rPr>
+              <a:t>サンクスLINE</a:t>
+            </a:r>
+          </a:p>
+        </p:txBody>
+      </p:sp>
+      <p:sp>
+        <p:nvSpPr>
+          <p:cNvPr id="17" name="Right Arrow 16"/>
           <p:cNvSpPr/>
           <p:nvPr/>
         </p:nvSpPr>
         <p:spPr>
           <a:xfrm>
-            <a:off x="6523199" y="2215800"/>
-            <a:ext cx="2951999" cy="503999"/>
-          </a:xfrm>
-          <a:prstGeom prst="roundRect">
-            <a:avLst>
-              <a:gd name="adj" fmla="val 10000"/>
-            </a:avLst>
-          </a:prstGeom>
-          <a:solidFill>
-            <a:srgbClr val="1F285A"/>
+            <a:off x="7236000" y="3997800"/>
+            <a:ext cx="288000" cy="324000"/>
+          </a:xfrm>
+          <a:prstGeom prst="rightArrow">
+            <a:avLst/>
+          </a:prstGeom>
+          <a:solidFill>
+            <a:srgbClr val="06C755"/>
           </a:solidFill>
           <a:ln>
             <a:noFill/>
@@ -5468,7 +7089,54 @@
           </a:fontRef>
         </p:style>
         <p:txBody>
-          <a:bodyPr rtlCol="0" anchor="ctr" wrap="square" lIns="54000" rIns="54000" tIns="18000" bIns="18000"/>
+          <a:bodyPr rtlCol="0" anchor="ctr"/>
+          <a:lstStyle/>
+          <a:p>
+            <a:pPr algn="ctr"/>
+            <a:endParaRPr/>
+          </a:p>
+        </p:txBody>
+      </p:sp>
+      <p:sp>
+        <p:nvSpPr>
+          <p:cNvPr id="18" name="Rounded Rectangle 17"/>
+          <p:cNvSpPr/>
+          <p:nvPr/>
+        </p:nvSpPr>
+        <p:spPr>
+          <a:xfrm>
+            <a:off x="7596000" y="3727800"/>
+            <a:ext cx="1879200" cy="864000"/>
+          </a:xfrm>
+          <a:prstGeom prst="roundRect">
+            <a:avLst>
+              <a:gd name="adj" fmla="val 10000"/>
+            </a:avLst>
+          </a:prstGeom>
+          <a:solidFill>
+            <a:srgbClr val="06C755"/>
+          </a:solidFill>
+          <a:ln>
+            <a:noFill/>
+          </a:ln>
+          <a:effectLst/>
+        </p:spPr>
+        <p:style>
+          <a:lnRef idx="1">
+            <a:schemeClr val="accent1"/>
+          </a:lnRef>
+          <a:fillRef idx="3">
+            <a:schemeClr val="accent1"/>
+          </a:fillRef>
+          <a:effectRef idx="2">
+            <a:schemeClr val="accent1"/>
+          </a:effectRef>
+          <a:fontRef idx="minor">
+            <a:schemeClr val="lt1"/>
+          </a:fontRef>
+        </p:style>
+        <p:txBody>
+          <a:bodyPr wrap="square" lIns="54000" tIns="18000" rIns="54000" bIns="18000" rtlCol="0" anchor="ctr"/>
           <a:lstStyle/>
           <a:p>
             <a:pPr algn="ctr">
@@ -5477,7 +7145,7 @@
               </a:lnSpc>
             </a:pPr>
             <a:r>
-              <a:rPr sz="1400" b="1">
+              <a:rPr sz="1500" b="1">
                 <a:solidFill>
                   <a:srgbClr val="FFFFFF"/>
                 </a:solidFill>
@@ -5485,24 +7153,44 @@
                 <a:ea typeface="メイリオ"/>
                 <a:cs typeface="メイリオ"/>
               </a:rPr>
-              <a:t>購入した方</a:t>
-            </a:r>
-          </a:p>
-        </p:txBody>
-      </p:sp>
-      <p:sp>
-        <p:nvSpPr>
-          <p:cNvPr id="16" name="Down Arrow 15"/>
+              <a:t>成約 24件</a:t>
+            </a:r>
+          </a:p>
+          <a:p>
+            <a:pPr algn="ctr">
+              <a:lnSpc>
+                <a:spcPct val="120000"/>
+              </a:lnSpc>
+            </a:pPr>
+            <a:r>
+              <a:rPr sz="1300" b="0">
+                <a:solidFill>
+                  <a:srgbClr val="FFFFFF"/>
+                </a:solidFill>
+                <a:latin typeface="メイリオ"/>
+                <a:ea typeface="メイリオ"/>
+                <a:cs typeface="メイリオ"/>
+              </a:rPr>
+              <a:t>1件あたり 約4.3万円</a:t>
+            </a:r>
+          </a:p>
+        </p:txBody>
+      </p:sp>
+      <p:sp>
+        <p:nvSpPr>
+          <p:cNvPr id="19" name="Rounded Rectangle 18"/>
           <p:cNvSpPr/>
           <p:nvPr/>
         </p:nvSpPr>
         <p:spPr>
           <a:xfrm>
-            <a:off x="7783199" y="2773801"/>
-            <a:ext cx="432000" cy="251999"/>
-          </a:xfrm>
-          <a:prstGeom prst="downArrow">
-            <a:avLst/>
+            <a:off x="432000" y="4879800"/>
+            <a:ext cx="9043200" cy="503999"/>
+          </a:xfrm>
+          <a:prstGeom prst="roundRect">
+            <a:avLst>
+              <a:gd name="adj" fmla="val 10000"/>
+            </a:avLst>
           </a:prstGeom>
           <a:solidFill>
             <a:srgbClr val="1F285A"/>
@@ -5527,221 +7215,7 @@
           </a:fontRef>
         </p:style>
         <p:txBody>
-          <a:bodyPr rtlCol="0" anchor="ctr"/>
-          <a:lstStyle/>
-          <a:p>
-            <a:pPr algn="ctr"/>
-          </a:p>
-        </p:txBody>
-      </p:sp>
-      <p:sp>
-        <p:nvSpPr>
-          <p:cNvPr id="17" name="Rounded Rectangle 16"/>
-          <p:cNvSpPr/>
-          <p:nvPr/>
-        </p:nvSpPr>
-        <p:spPr>
-          <a:xfrm>
-            <a:off x="6523199" y="3079801"/>
-            <a:ext cx="2951999" cy="648000"/>
-          </a:xfrm>
-          <a:prstGeom prst="roundRect">
-            <a:avLst>
-              <a:gd name="adj" fmla="val 10000"/>
-            </a:avLst>
-          </a:prstGeom>
-          <a:solidFill>
-            <a:srgbClr val="F4F7FF"/>
-          </a:solidFill>
-          <a:ln w="12700">
-            <a:solidFill>
-              <a:srgbClr val="D9D9D9"/>
-            </a:solidFill>
-          </a:ln>
-          <a:effectLst/>
-        </p:spPr>
-        <p:style>
-          <a:lnRef idx="1">
-            <a:schemeClr val="accent1"/>
-          </a:lnRef>
-          <a:fillRef idx="3">
-            <a:schemeClr val="accent1"/>
-          </a:fillRef>
-          <a:effectRef idx="2">
-            <a:schemeClr val="accent1"/>
-          </a:effectRef>
-          <a:fontRef idx="minor">
-            <a:schemeClr val="lt1"/>
-          </a:fontRef>
-        </p:style>
-        <p:txBody>
-          <a:bodyPr rtlCol="0" anchor="ctr" wrap="square" lIns="54000" rIns="54000" tIns="18000" bIns="18000"/>
-          <a:lstStyle/>
-          <a:p>
-            <a:pPr algn="ctr">
-              <a:lnSpc>
-                <a:spcPct val="120000"/>
-              </a:lnSpc>
-            </a:pPr>
-            <a:r>
-              <a:rPr sz="1300" b="1">
-                <a:solidFill>
-                  <a:srgbClr val="1F285A"/>
-                </a:solidFill>
-                <a:latin typeface="メイリオ"/>
-                <a:ea typeface="メイリオ"/>
-                <a:cs typeface="メイリオ"/>
-              </a:rPr>
-              <a:t>使い方・次回のご案内</a:t>
-            </a:r>
-          </a:p>
-        </p:txBody>
-      </p:sp>
-      <p:sp>
-        <p:nvSpPr>
-          <p:cNvPr id="18" name="Down Arrow 17"/>
-          <p:cNvSpPr/>
-          <p:nvPr/>
-        </p:nvSpPr>
-        <p:spPr>
-          <a:xfrm>
-            <a:off x="7783199" y="3781800"/>
-            <a:ext cx="432000" cy="251999"/>
-          </a:xfrm>
-          <a:prstGeom prst="downArrow">
-            <a:avLst/>
-          </a:prstGeom>
-          <a:solidFill>
-            <a:srgbClr val="06C755"/>
-          </a:solidFill>
-          <a:ln>
-            <a:noFill/>
-          </a:ln>
-          <a:effectLst/>
-        </p:spPr>
-        <p:style>
-          <a:lnRef idx="1">
-            <a:schemeClr val="accent1"/>
-          </a:lnRef>
-          <a:fillRef idx="3">
-            <a:schemeClr val="accent1"/>
-          </a:fillRef>
-          <a:effectRef idx="2">
-            <a:schemeClr val="accent1"/>
-          </a:effectRef>
-          <a:fontRef idx="minor">
-            <a:schemeClr val="lt1"/>
-          </a:fontRef>
-        </p:style>
-        <p:txBody>
-          <a:bodyPr rtlCol="0" anchor="ctr"/>
-          <a:lstStyle/>
-          <a:p>
-            <a:pPr algn="ctr"/>
-          </a:p>
-        </p:txBody>
-      </p:sp>
-      <p:sp>
-        <p:nvSpPr>
-          <p:cNvPr id="19" name="Rounded Rectangle 18"/>
-          <p:cNvSpPr/>
-          <p:nvPr/>
-        </p:nvSpPr>
-        <p:spPr>
-          <a:xfrm>
-            <a:off x="6523199" y="4087801"/>
-            <a:ext cx="2951999" cy="503999"/>
-          </a:xfrm>
-          <a:prstGeom prst="roundRect">
-            <a:avLst>
-              <a:gd name="adj" fmla="val 10000"/>
-            </a:avLst>
-          </a:prstGeom>
-          <a:solidFill>
-            <a:srgbClr val="06C755"/>
-          </a:solidFill>
-          <a:ln>
-            <a:noFill/>
-          </a:ln>
-          <a:effectLst/>
-        </p:spPr>
-        <p:style>
-          <a:lnRef idx="1">
-            <a:schemeClr val="accent1"/>
-          </a:lnRef>
-          <a:fillRef idx="3">
-            <a:schemeClr val="accent1"/>
-          </a:fillRef>
-          <a:effectRef idx="2">
-            <a:schemeClr val="accent1"/>
-          </a:effectRef>
-          <a:fontRef idx="minor">
-            <a:schemeClr val="lt1"/>
-          </a:fontRef>
-        </p:style>
-        <p:txBody>
-          <a:bodyPr rtlCol="0" anchor="ctr" wrap="square" lIns="54000" rIns="54000" tIns="18000" bIns="18000"/>
-          <a:lstStyle/>
-          <a:p>
-            <a:pPr algn="ctr">
-              <a:lnSpc>
-                <a:spcPct val="120000"/>
-              </a:lnSpc>
-            </a:pPr>
-            <a:r>
-              <a:rPr sz="1400" b="1">
-                <a:solidFill>
-                  <a:srgbClr val="FFFFFF"/>
-                </a:solidFill>
-                <a:latin typeface="メイリオ"/>
-                <a:ea typeface="メイリオ"/>
-                <a:cs typeface="メイリオ"/>
-              </a:rPr>
-              <a:t>リピートへ</a:t>
-            </a:r>
-          </a:p>
-        </p:txBody>
-      </p:sp>
-      <p:sp>
-        <p:nvSpPr>
-          <p:cNvPr id="20" name="Rounded Rectangle 19"/>
-          <p:cNvSpPr/>
-          <p:nvPr/>
-        </p:nvSpPr>
-        <p:spPr>
-          <a:xfrm>
-            <a:off x="432000" y="4951801"/>
-            <a:ext cx="9043200" cy="503999"/>
-          </a:xfrm>
-          <a:prstGeom prst="roundRect">
-            <a:avLst>
-              <a:gd name="adj" fmla="val 10000"/>
-            </a:avLst>
-          </a:prstGeom>
-          <a:solidFill>
-            <a:srgbClr val="1F285A"/>
-          </a:solidFill>
-          <a:ln>
-            <a:noFill/>
-          </a:ln>
-          <a:effectLst/>
-        </p:spPr>
-        <p:style>
-          <a:lnRef idx="1">
-            <a:schemeClr val="accent1"/>
-          </a:lnRef>
-          <a:fillRef idx="3">
-            <a:schemeClr val="accent1"/>
-          </a:fillRef>
-          <a:effectRef idx="2">
-            <a:schemeClr val="accent1"/>
-          </a:effectRef>
-          <a:fontRef idx="minor">
-            <a:schemeClr val="lt1"/>
-          </a:fontRef>
-        </p:style>
-        <p:txBody>
-          <a:bodyPr rtlCol="0" anchor="ctr" wrap="square" lIns="108000" rIns="108000" tIns="0" bIns="0"/>
+          <a:bodyPr wrap="square" lIns="108000" tIns="0" rIns="108000" bIns="0" rtlCol="0" anchor="ctr"/>
           <a:lstStyle/>
           <a:p>
             <a:pPr algn="ctr">
@@ -5750,7 +7224,7 @@
               </a:lnSpc>
             </a:pPr>
             <a:r>
-              <a:rPr sz="1400" b="1">
+              <a:rPr sz="1400" b="1" dirty="0" err="1">
                 <a:solidFill>
                   <a:srgbClr val="FFFFFF"/>
                 </a:solidFill>
@@ -5758,17 +7232,83 @@
                 <a:ea typeface="メイリオ"/>
                 <a:cs typeface="メイリオ"/>
               </a:rPr>
-              <a:t>弊社実績：美容クリニックで、予約後の来院率が40〜50%改善</a:t>
+              <a:t>LINEの友だちは毎月たまり</a:t>
+            </a:r>
+            <a:r>
+              <a:rPr sz="1400" b="1" dirty="0">
+                <a:solidFill>
+                  <a:srgbClr val="FFFFFF"/>
+                </a:solidFill>
+                <a:latin typeface="メイリオ"/>
+                <a:ea typeface="メイリオ"/>
+                <a:cs typeface="メイリオ"/>
+              </a:rPr>
+              <a:t>、</a:t>
+            </a:r>
+            <a:r>
+              <a:rPr lang="ja-JP" altLang="en-US" sz="1400" b="1" dirty="0">
+                <a:solidFill>
+                  <a:srgbClr val="FFFFFF"/>
+                </a:solidFill>
+                <a:latin typeface="メイリオ"/>
+                <a:ea typeface="メイリオ"/>
+                <a:cs typeface="メイリオ"/>
+              </a:rPr>
+              <a:t>案内・成約まで</a:t>
+            </a:r>
+            <a:endParaRPr lang="en-US" altLang="ja-JP" sz="1400" b="1" dirty="0">
+              <a:solidFill>
+                <a:srgbClr val="FFFFFF"/>
+              </a:solidFill>
+              <a:latin typeface="メイリオ"/>
+              <a:ea typeface="メイリオ"/>
+              <a:cs typeface="メイリオ"/>
+            </a:endParaRPr>
+          </a:p>
+        </p:txBody>
+      </p:sp>
+      <p:sp>
+        <p:nvSpPr>
+          <p:cNvPr id="20" name="TextBox 19"/>
+          <p:cNvSpPr txBox="1"/>
+          <p:nvPr/>
+        </p:nvSpPr>
+        <p:spPr>
+          <a:xfrm>
+            <a:off x="432000" y="6246000"/>
+            <a:ext cx="9043200" cy="324000"/>
+          </a:xfrm>
+          <a:prstGeom prst="rect">
+            <a:avLst/>
+          </a:prstGeom>
+          <a:noFill/>
+        </p:spPr>
+        <p:txBody>
+          <a:bodyPr wrap="square" lIns="0" tIns="21600" rIns="0" bIns="21600" anchor="t">
+            <a:spAutoFit/>
+          </a:bodyPr>
+          <a:lstStyle/>
+          <a:p>
+            <a:pPr algn="l">
+              <a:lnSpc>
+                <a:spcPct val="115000"/>
+              </a:lnSpc>
+            </a:pPr>
+            <a:r>
+              <a:rPr sz="750">
+                <a:solidFill>
+                  <a:srgbClr val="7F7F7F"/>
+                </a:solidFill>
+                <a:latin typeface="メイリオ"/>
+                <a:ea typeface="メイリオ"/>
+                <a:cs typeface="メイリオ"/>
+              </a:rPr>
+              <a:t>※試算例：成約率 20%（広告だけ）→ 24%（広告＋LINE）。1件あたり＝（広告費＋LINE費用 月3万円）÷成約件数</a:t>
             </a:r>
           </a:p>
         </p:txBody>
       </p:sp>
     </p:spTree>
-    <p:extLst>
-      <p:ext uri="{BB962C8B-B14F-4D97-AF65-F5344CB8AC3E}">
-        <p14:creationId xmlns:p14="http://schemas.microsoft.com/office/powerpoint/2010/main" val="3939997984"/>
-      </p:ext>
-    </p:extLst>
   </p:cSld>
   <p:clrMapOvr>
     <a:masterClrMapping/>
@@ -5777,1123 +7317,6 @@
 </file>
 
 <file path=ppt/slides/slide5.xml><?xml version="1.0" encoding="utf-8"?>
-<p:sld xmlns:a="http://schemas.openxmlformats.org/drawingml/2006/main" xmlns:r="http://schemas.openxmlformats.org/officeDocument/2006/relationships" xmlns:p="http://schemas.openxmlformats.org/presentationml/2006/main">
-  <p:cSld>
-    <p:spTree>
-      <p:nvGrpSpPr>
-        <p:cNvPr id="1" name=""/>
-        <p:cNvGrpSpPr/>
-        <p:nvPr/>
-      </p:nvGrpSpPr>
-      <p:grpSpPr>
-        <a:xfrm>
-          <a:off x="0" y="0"/>
-          <a:ext cx="0" cy="0"/>
-          <a:chOff x="0" y="0"/>
-          <a:chExt cx="0" cy="0"/>
-        </a:xfrm>
-      </p:grpSpPr>
-      <p:sp>
-        <p:nvSpPr>
-          <p:cNvPr id="2" name="TextBox 1"/>
-          <p:cNvSpPr txBox="1"/>
-          <p:nvPr/>
-        </p:nvSpPr>
-        <p:spPr>
-          <a:xfrm>
-            <a:off x="547200" y="136800"/>
-            <a:ext cx="8784000" cy="338400"/>
-          </a:xfrm>
-          <a:prstGeom prst="rect">
-            <a:avLst/>
-          </a:prstGeom>
-          <a:noFill/>
-        </p:spPr>
-        <p:txBody>
-          <a:bodyPr wrap="square" lIns="0" rIns="0" tIns="21600" bIns="21600" anchor="ctr">
-            <a:spAutoFit/>
-          </a:bodyPr>
-          <a:lstStyle/>
-          <a:p>
-            <a:pPr algn="l"/>
-            <a:r>
-              <a:rPr sz="1600" b="1">
-                <a:solidFill>
-                  <a:srgbClr val="002060"/>
-                </a:solidFill>
-                <a:latin typeface="メイリオ"/>
-                <a:ea typeface="メイリオ"/>
-                <a:cs typeface="メイリオ"/>
-              </a:rPr>
-              <a:t>広告は「申込みの数」、LINEは「売上」をつくる</a:t>
-            </a:r>
-          </a:p>
-        </p:txBody>
-      </p:sp>
-      <p:sp>
-        <p:nvSpPr>
-          <p:cNvPr id="3" name="TextBox 2"/>
-          <p:cNvSpPr txBox="1"/>
-          <p:nvPr/>
-        </p:nvSpPr>
-        <p:spPr>
-          <a:xfrm>
-            <a:off x="432000" y="648000"/>
-            <a:ext cx="9036000" cy="684000"/>
-          </a:xfrm>
-          <a:prstGeom prst="rect">
-            <a:avLst/>
-          </a:prstGeom>
-          <a:noFill/>
-        </p:spPr>
-        <p:txBody>
-          <a:bodyPr wrap="square" lIns="0" rIns="0" tIns="21600" bIns="21600" anchor="ctr">
-            <a:spAutoFit/>
-          </a:bodyPr>
-          <a:lstStyle/>
-          <a:p>
-            <a:pPr algn="l">
-              <a:lnSpc>
-                <a:spcPct val="130000"/>
-              </a:lnSpc>
-            </a:pPr>
-            <a:r>
-              <a:rPr sz="1250">
-                <a:solidFill>
-                  <a:srgbClr val="333333"/>
-                </a:solidFill>
-                <a:latin typeface="メイリオ"/>
-                <a:ea typeface="メイリオ"/>
-                <a:cs typeface="メイリオ"/>
-              </a:rPr>
-              <a:t>同じ広告費のまま、申込みの「後」を伸ばして成約を増やします。</a:t>
-            </a:r>
-          </a:p>
-        </p:txBody>
-      </p:sp>
-      <p:cxnSp>
-        <p:nvCxnSpPr>
-          <p:cNvPr id="4" name="Connector 3"/>
-          <p:cNvCxnSpPr/>
-          <p:nvPr/>
-        </p:nvCxnSpPr>
-        <p:spPr>
-          <a:xfrm>
-            <a:off x="0" y="1389600"/>
-            <a:ext cx="9907200" cy="0"/>
-          </a:xfrm>
-          <a:prstGeom prst="line">
-            <a:avLst/>
-          </a:prstGeom>
-          <a:ln w="12700">
-            <a:solidFill>
-              <a:srgbClr val="D9D9D9"/>
-            </a:solidFill>
-          </a:ln>
-        </p:spPr>
-        <p:style>
-          <a:lnRef idx="2">
-            <a:schemeClr val="accent1"/>
-          </a:lnRef>
-          <a:fillRef idx="0">
-            <a:schemeClr val="accent1"/>
-          </a:fillRef>
-          <a:effectRef idx="1">
-            <a:schemeClr val="accent1"/>
-          </a:effectRef>
-          <a:fontRef idx="minor">
-            <a:schemeClr val="tx1"/>
-          </a:fontRef>
-        </p:style>
-      </p:cxnSp>
-      <p:sp>
-        <p:nvSpPr>
-          <p:cNvPr id="5" name="Rounded Rectangle 4"/>
-          <p:cNvSpPr/>
-          <p:nvPr/>
-        </p:nvSpPr>
-        <p:spPr>
-          <a:xfrm>
-            <a:off x="1584000" y="2287800"/>
-            <a:ext cx="3204000" cy="270000"/>
-          </a:xfrm>
-          <a:prstGeom prst="roundRect">
-            <a:avLst>
-              <a:gd name="adj" fmla="val 18000"/>
-            </a:avLst>
-          </a:prstGeom>
-          <a:solidFill>
-            <a:srgbClr val="1F285A"/>
-          </a:solidFill>
-          <a:ln>
-            <a:noFill/>
-          </a:ln>
-          <a:effectLst/>
-        </p:spPr>
-        <p:style>
-          <a:lnRef idx="1">
-            <a:schemeClr val="accent1"/>
-          </a:lnRef>
-          <a:fillRef idx="3">
-            <a:schemeClr val="accent1"/>
-          </a:fillRef>
-          <a:effectRef idx="2">
-            <a:schemeClr val="accent1"/>
-          </a:effectRef>
-          <a:fontRef idx="minor">
-            <a:schemeClr val="lt1"/>
-          </a:fontRef>
-        </p:style>
-        <p:txBody>
-          <a:bodyPr rtlCol="0" anchor="ctr" wrap="square" lIns="36000" rIns="36000" tIns="0" bIns="0"/>
-          <a:lstStyle/>
-          <a:p>
-            <a:pPr algn="ctr"/>
-            <a:r>
-              <a:rPr sz="1100" b="1">
-                <a:solidFill>
-                  <a:srgbClr val="FFFFFF"/>
-                </a:solidFill>
-                <a:latin typeface="メイリオ"/>
-                <a:ea typeface="メイリオ"/>
-                <a:cs typeface="メイリオ"/>
-              </a:rPr>
-              <a:t>広告の役割：申込みを集める</a:t>
-            </a:r>
-          </a:p>
-        </p:txBody>
-      </p:sp>
-      <p:sp>
-        <p:nvSpPr>
-          <p:cNvPr id="6" name="Rounded Rectangle 5"/>
-          <p:cNvSpPr/>
-          <p:nvPr/>
-        </p:nvSpPr>
-        <p:spPr>
-          <a:xfrm>
-            <a:off x="4896000" y="2287800"/>
-            <a:ext cx="4579200" cy="270000"/>
-          </a:xfrm>
-          <a:prstGeom prst="roundRect">
-            <a:avLst>
-              <a:gd name="adj" fmla="val 18000"/>
-            </a:avLst>
-          </a:prstGeom>
-          <a:solidFill>
-            <a:srgbClr val="06C755"/>
-          </a:solidFill>
-          <a:ln>
-            <a:noFill/>
-          </a:ln>
-          <a:effectLst/>
-        </p:spPr>
-        <p:style>
-          <a:lnRef idx="1">
-            <a:schemeClr val="accent1"/>
-          </a:lnRef>
-          <a:fillRef idx="3">
-            <a:schemeClr val="accent1"/>
-          </a:fillRef>
-          <a:effectRef idx="2">
-            <a:schemeClr val="accent1"/>
-          </a:effectRef>
-          <a:fontRef idx="minor">
-            <a:schemeClr val="lt1"/>
-          </a:fontRef>
-        </p:style>
-        <p:txBody>
-          <a:bodyPr rtlCol="0" anchor="ctr" wrap="square" lIns="36000" rIns="36000" tIns="0" bIns="0"/>
-          <a:lstStyle/>
-          <a:p>
-            <a:pPr algn="ctr"/>
-            <a:r>
-              <a:rPr sz="1100" b="1">
-                <a:solidFill>
-                  <a:srgbClr val="FFFFFF"/>
-                </a:solidFill>
-                <a:latin typeface="メイリオ"/>
-                <a:ea typeface="メイリオ"/>
-                <a:cs typeface="メイリオ"/>
-              </a:rPr>
-              <a:t>LINEの役割：申込んだ方を売上へ</a:t>
-            </a:r>
-          </a:p>
-        </p:txBody>
-      </p:sp>
-      <p:sp>
-        <p:nvSpPr>
-          <p:cNvPr id="7" name="Rounded Rectangle 6"/>
-          <p:cNvSpPr/>
-          <p:nvPr/>
-        </p:nvSpPr>
-        <p:spPr>
-          <a:xfrm>
-            <a:off x="432000" y="2683800"/>
-            <a:ext cx="1044000" cy="864000"/>
-          </a:xfrm>
-          <a:prstGeom prst="roundRect">
-            <a:avLst>
-              <a:gd name="adj" fmla="val 10000"/>
-            </a:avLst>
-          </a:prstGeom>
-          <a:solidFill>
-            <a:srgbClr val="EDEDED"/>
-          </a:solidFill>
-          <a:ln>
-            <a:noFill/>
-          </a:ln>
-          <a:effectLst/>
-        </p:spPr>
-        <p:style>
-          <a:lnRef idx="1">
-            <a:schemeClr val="accent1"/>
-          </a:lnRef>
-          <a:fillRef idx="3">
-            <a:schemeClr val="accent1"/>
-          </a:fillRef>
-          <a:effectRef idx="2">
-            <a:schemeClr val="accent1"/>
-          </a:effectRef>
-          <a:fontRef idx="minor">
-            <a:schemeClr val="lt1"/>
-          </a:fontRef>
-        </p:style>
-        <p:txBody>
-          <a:bodyPr rtlCol="0" anchor="ctr" wrap="square" lIns="54000" rIns="54000" tIns="18000" bIns="18000"/>
-          <a:lstStyle/>
-          <a:p>
-            <a:pPr algn="ctr">
-              <a:lnSpc>
-                <a:spcPct val="120000"/>
-              </a:lnSpc>
-            </a:pPr>
-            <a:r>
-              <a:rPr sz="1200" b="1">
-                <a:solidFill>
-                  <a:srgbClr val="7F7F7F"/>
-                </a:solidFill>
-                <a:latin typeface="メイリオ"/>
-                <a:ea typeface="メイリオ"/>
-                <a:cs typeface="メイリオ"/>
-              </a:rPr>
-              <a:t>広告だけ</a:t>
-            </a:r>
-          </a:p>
-        </p:txBody>
-      </p:sp>
-      <p:sp>
-        <p:nvSpPr>
-          <p:cNvPr id="8" name="Rounded Rectangle 7"/>
-          <p:cNvSpPr/>
-          <p:nvPr/>
-        </p:nvSpPr>
-        <p:spPr>
-          <a:xfrm>
-            <a:off x="1584000" y="2683800"/>
-            <a:ext cx="3204000" cy="864000"/>
-          </a:xfrm>
-          <a:prstGeom prst="roundRect">
-            <a:avLst>
-              <a:gd name="adj" fmla="val 10000"/>
-            </a:avLst>
-          </a:prstGeom>
-          <a:solidFill>
-            <a:srgbClr val="F4F7FF"/>
-          </a:solidFill>
-          <a:ln w="12700">
-            <a:solidFill>
-              <a:srgbClr val="D9D9D9"/>
-            </a:solidFill>
-          </a:ln>
-          <a:effectLst/>
-        </p:spPr>
-        <p:style>
-          <a:lnRef idx="1">
-            <a:schemeClr val="accent1"/>
-          </a:lnRef>
-          <a:fillRef idx="3">
-            <a:schemeClr val="accent1"/>
-          </a:fillRef>
-          <a:effectRef idx="2">
-            <a:schemeClr val="accent1"/>
-          </a:effectRef>
-          <a:fontRef idx="minor">
-            <a:schemeClr val="lt1"/>
-          </a:fontRef>
-        </p:style>
-        <p:txBody>
-          <a:bodyPr rtlCol="0" anchor="ctr" wrap="square" lIns="54000" rIns="54000" tIns="18000" bIns="18000"/>
-          <a:lstStyle/>
-          <a:p>
-            <a:pPr algn="ctr">
-              <a:lnSpc>
-                <a:spcPct val="120000"/>
-              </a:lnSpc>
-            </a:pPr>
-            <a:r>
-              <a:rPr sz="1400" b="1">
-                <a:solidFill>
-                  <a:srgbClr val="1F285A"/>
-                </a:solidFill>
-                <a:latin typeface="メイリオ"/>
-                <a:ea typeface="メイリオ"/>
-                <a:cs typeface="メイリオ"/>
-              </a:rPr>
-              <a:t>申込み 100件</a:t>
-            </a:r>
-          </a:p>
-          <a:p>
-            <a:pPr algn="ctr">
-              <a:lnSpc>
-                <a:spcPct val="120000"/>
-              </a:lnSpc>
-            </a:pPr>
-            <a:r>
-              <a:rPr sz="1200" b="0">
-                <a:solidFill>
-                  <a:srgbClr val="1F285A"/>
-                </a:solidFill>
-                <a:latin typeface="メイリオ"/>
-                <a:ea typeface="メイリオ"/>
-                <a:cs typeface="メイリオ"/>
-              </a:rPr>
-              <a:t>広告費 月100万円</a:t>
-            </a:r>
-          </a:p>
-        </p:txBody>
-      </p:sp>
-      <p:sp>
-        <p:nvSpPr>
-          <p:cNvPr id="9" name="Right Arrow 8"/>
-          <p:cNvSpPr/>
-          <p:nvPr/>
-        </p:nvSpPr>
-        <p:spPr>
-          <a:xfrm>
-            <a:off x="4860000" y="2953800"/>
-            <a:ext cx="288000" cy="324000"/>
-          </a:xfrm>
-          <a:prstGeom prst="rightArrow">
-            <a:avLst/>
-          </a:prstGeom>
-          <a:solidFill>
-            <a:srgbClr val="7F7F7F"/>
-          </a:solidFill>
-          <a:ln>
-            <a:noFill/>
-          </a:ln>
-          <a:effectLst/>
-        </p:spPr>
-        <p:style>
-          <a:lnRef idx="1">
-            <a:schemeClr val="accent1"/>
-          </a:lnRef>
-          <a:fillRef idx="3">
-            <a:schemeClr val="accent1"/>
-          </a:fillRef>
-          <a:effectRef idx="2">
-            <a:schemeClr val="accent1"/>
-          </a:effectRef>
-          <a:fontRef idx="minor">
-            <a:schemeClr val="lt1"/>
-          </a:fontRef>
-        </p:style>
-        <p:txBody>
-          <a:bodyPr rtlCol="0" anchor="ctr"/>
-          <a:lstStyle/>
-          <a:p>
-            <a:pPr algn="ctr"/>
-          </a:p>
-        </p:txBody>
-      </p:sp>
-      <p:sp>
-        <p:nvSpPr>
-          <p:cNvPr id="10" name="Rounded Rectangle 9"/>
-          <p:cNvSpPr/>
-          <p:nvPr/>
-        </p:nvSpPr>
-        <p:spPr>
-          <a:xfrm>
-            <a:off x="5220000" y="2683800"/>
-            <a:ext cx="1944000" cy="864000"/>
-          </a:xfrm>
-          <a:prstGeom prst="roundRect">
-            <a:avLst>
-              <a:gd name="adj" fmla="val 10000"/>
-            </a:avLst>
-          </a:prstGeom>
-          <a:solidFill>
-            <a:srgbClr val="FFFFFF"/>
-          </a:solidFill>
-          <a:ln w="19050">
-            <a:solidFill>
-              <a:srgbClr val="7F7F7F"/>
-            </a:solidFill>
-            <a:prstDash val="dash"/>
-          </a:ln>
-          <a:effectLst/>
-        </p:spPr>
-        <p:style>
-          <a:lnRef idx="1">
-            <a:schemeClr val="accent1"/>
-          </a:lnRef>
-          <a:fillRef idx="3">
-            <a:schemeClr val="accent1"/>
-          </a:fillRef>
-          <a:effectRef idx="2">
-            <a:schemeClr val="accent1"/>
-          </a:effectRef>
-          <a:fontRef idx="minor">
-            <a:schemeClr val="lt1"/>
-          </a:fontRef>
-        </p:style>
-        <p:txBody>
-          <a:bodyPr rtlCol="0" anchor="ctr" wrap="square" lIns="54000" rIns="54000" tIns="18000" bIns="18000"/>
-          <a:lstStyle/>
-          <a:p>
-            <a:pPr algn="ctr">
-              <a:lnSpc>
-                <a:spcPct val="120000"/>
-              </a:lnSpc>
-            </a:pPr>
-            <a:r>
-              <a:rPr sz="1300" b="1">
-                <a:solidFill>
-                  <a:srgbClr val="7F7F7F"/>
-                </a:solidFill>
-                <a:latin typeface="メイリオ"/>
-                <a:ea typeface="メイリオ"/>
-                <a:cs typeface="メイリオ"/>
-              </a:rPr>
-              <a:t>メール・電話</a:t>
-            </a:r>
-          </a:p>
-        </p:txBody>
-      </p:sp>
-      <p:sp>
-        <p:nvSpPr>
-          <p:cNvPr id="11" name="Right Arrow 10"/>
-          <p:cNvSpPr/>
-          <p:nvPr/>
-        </p:nvSpPr>
-        <p:spPr>
-          <a:xfrm>
-            <a:off x="7236000" y="2953800"/>
-            <a:ext cx="288000" cy="324000"/>
-          </a:xfrm>
-          <a:prstGeom prst="rightArrow">
-            <a:avLst/>
-          </a:prstGeom>
-          <a:solidFill>
-            <a:srgbClr val="7F7F7F"/>
-          </a:solidFill>
-          <a:ln>
-            <a:noFill/>
-          </a:ln>
-          <a:effectLst/>
-        </p:spPr>
-        <p:style>
-          <a:lnRef idx="1">
-            <a:schemeClr val="accent1"/>
-          </a:lnRef>
-          <a:fillRef idx="3">
-            <a:schemeClr val="accent1"/>
-          </a:fillRef>
-          <a:effectRef idx="2">
-            <a:schemeClr val="accent1"/>
-          </a:effectRef>
-          <a:fontRef idx="minor">
-            <a:schemeClr val="lt1"/>
-          </a:fontRef>
-        </p:style>
-        <p:txBody>
-          <a:bodyPr rtlCol="0" anchor="ctr"/>
-          <a:lstStyle/>
-          <a:p>
-            <a:pPr algn="ctr"/>
-          </a:p>
-        </p:txBody>
-      </p:sp>
-      <p:sp>
-        <p:nvSpPr>
-          <p:cNvPr id="12" name="Rounded Rectangle 11"/>
-          <p:cNvSpPr/>
-          <p:nvPr/>
-        </p:nvSpPr>
-        <p:spPr>
-          <a:xfrm>
-            <a:off x="7596000" y="2683800"/>
-            <a:ext cx="1879200" cy="864000"/>
-          </a:xfrm>
-          <a:prstGeom prst="roundRect">
-            <a:avLst>
-              <a:gd name="adj" fmla="val 10000"/>
-            </a:avLst>
-          </a:prstGeom>
-          <a:solidFill>
-            <a:srgbClr val="EDEDED"/>
-          </a:solidFill>
-          <a:ln>
-            <a:noFill/>
-          </a:ln>
-          <a:effectLst/>
-        </p:spPr>
-        <p:style>
-          <a:lnRef idx="1">
-            <a:schemeClr val="accent1"/>
-          </a:lnRef>
-          <a:fillRef idx="3">
-            <a:schemeClr val="accent1"/>
-          </a:fillRef>
-          <a:effectRef idx="2">
-            <a:schemeClr val="accent1"/>
-          </a:effectRef>
-          <a:fontRef idx="minor">
-            <a:schemeClr val="lt1"/>
-          </a:fontRef>
-        </p:style>
-        <p:txBody>
-          <a:bodyPr rtlCol="0" anchor="ctr" wrap="square" lIns="54000" rIns="54000" tIns="18000" bIns="18000"/>
-          <a:lstStyle/>
-          <a:p>
-            <a:pPr algn="ctr">
-              <a:lnSpc>
-                <a:spcPct val="120000"/>
-              </a:lnSpc>
-            </a:pPr>
-            <a:r>
-              <a:rPr sz="1500" b="1">
-                <a:solidFill>
-                  <a:srgbClr val="333333"/>
-                </a:solidFill>
-                <a:latin typeface="メイリオ"/>
-                <a:ea typeface="メイリオ"/>
-                <a:cs typeface="メイリオ"/>
-              </a:rPr>
-              <a:t>成約 20件</a:t>
-            </a:r>
-          </a:p>
-          <a:p>
-            <a:pPr algn="ctr">
-              <a:lnSpc>
-                <a:spcPct val="120000"/>
-              </a:lnSpc>
-            </a:pPr>
-            <a:r>
-              <a:rPr sz="1300" b="0">
-                <a:solidFill>
-                  <a:srgbClr val="333333"/>
-                </a:solidFill>
-                <a:latin typeface="メイリオ"/>
-                <a:ea typeface="メイリオ"/>
-                <a:cs typeface="メイリオ"/>
-              </a:rPr>
-              <a:t>1件あたり 5.0万円</a:t>
-            </a:r>
-          </a:p>
-        </p:txBody>
-      </p:sp>
-      <p:sp>
-        <p:nvSpPr>
-          <p:cNvPr id="13" name="Rounded Rectangle 12"/>
-          <p:cNvSpPr/>
-          <p:nvPr/>
-        </p:nvSpPr>
-        <p:spPr>
-          <a:xfrm>
-            <a:off x="432000" y="3727800"/>
-            <a:ext cx="1044000" cy="864000"/>
-          </a:xfrm>
-          <a:prstGeom prst="roundRect">
-            <a:avLst>
-              <a:gd name="adj" fmla="val 10000"/>
-            </a:avLst>
-          </a:prstGeom>
-          <a:solidFill>
-            <a:srgbClr val="06C755"/>
-          </a:solidFill>
-          <a:ln>
-            <a:noFill/>
-          </a:ln>
-          <a:effectLst/>
-        </p:spPr>
-        <p:style>
-          <a:lnRef idx="1">
-            <a:schemeClr val="accent1"/>
-          </a:lnRef>
-          <a:fillRef idx="3">
-            <a:schemeClr val="accent1"/>
-          </a:fillRef>
-          <a:effectRef idx="2">
-            <a:schemeClr val="accent1"/>
-          </a:effectRef>
-          <a:fontRef idx="minor">
-            <a:schemeClr val="lt1"/>
-          </a:fontRef>
-        </p:style>
-        <p:txBody>
-          <a:bodyPr rtlCol="0" anchor="ctr" wrap="square" lIns="54000" rIns="54000" tIns="18000" bIns="18000"/>
-          <a:lstStyle/>
-          <a:p>
-            <a:pPr algn="ctr">
-              <a:lnSpc>
-                <a:spcPct val="120000"/>
-              </a:lnSpc>
-            </a:pPr>
-            <a:r>
-              <a:rPr sz="1200" b="1">
-                <a:solidFill>
-                  <a:srgbClr val="FFFFFF"/>
-                </a:solidFill>
-                <a:latin typeface="メイリオ"/>
-                <a:ea typeface="メイリオ"/>
-                <a:cs typeface="メイリオ"/>
-              </a:rPr>
-              <a:t>広告</a:t>
-            </a:r>
-          </a:p>
-          <a:p>
-            <a:pPr algn="ctr">
-              <a:lnSpc>
-                <a:spcPct val="120000"/>
-              </a:lnSpc>
-            </a:pPr>
-            <a:r>
-              <a:rPr sz="1000" b="0">
-                <a:solidFill>
-                  <a:srgbClr val="FFFFFF"/>
-                </a:solidFill>
-                <a:latin typeface="メイリオ"/>
-                <a:ea typeface="メイリオ"/>
-                <a:cs typeface="メイリオ"/>
-              </a:rPr>
-              <a:t>＋LINE</a:t>
-            </a:r>
-          </a:p>
-        </p:txBody>
-      </p:sp>
-      <p:sp>
-        <p:nvSpPr>
-          <p:cNvPr id="14" name="Rounded Rectangle 13"/>
-          <p:cNvSpPr/>
-          <p:nvPr/>
-        </p:nvSpPr>
-        <p:spPr>
-          <a:xfrm>
-            <a:off x="1584000" y="3727800"/>
-            <a:ext cx="3204000" cy="864000"/>
-          </a:xfrm>
-          <a:prstGeom prst="roundRect">
-            <a:avLst>
-              <a:gd name="adj" fmla="val 10000"/>
-            </a:avLst>
-          </a:prstGeom>
-          <a:solidFill>
-            <a:srgbClr val="F4F7FF"/>
-          </a:solidFill>
-          <a:ln w="12700">
-            <a:solidFill>
-              <a:srgbClr val="D9D9D9"/>
-            </a:solidFill>
-          </a:ln>
-          <a:effectLst/>
-        </p:spPr>
-        <p:style>
-          <a:lnRef idx="1">
-            <a:schemeClr val="accent1"/>
-          </a:lnRef>
-          <a:fillRef idx="3">
-            <a:schemeClr val="accent1"/>
-          </a:fillRef>
-          <a:effectRef idx="2">
-            <a:schemeClr val="accent1"/>
-          </a:effectRef>
-          <a:fontRef idx="minor">
-            <a:schemeClr val="lt1"/>
-          </a:fontRef>
-        </p:style>
-        <p:txBody>
-          <a:bodyPr rtlCol="0" anchor="ctr" wrap="square" lIns="54000" rIns="54000" tIns="18000" bIns="18000"/>
-          <a:lstStyle/>
-          <a:p>
-            <a:pPr algn="ctr">
-              <a:lnSpc>
-                <a:spcPct val="120000"/>
-              </a:lnSpc>
-            </a:pPr>
-            <a:r>
-              <a:rPr sz="1400" b="1">
-                <a:solidFill>
-                  <a:srgbClr val="1F285A"/>
-                </a:solidFill>
-                <a:latin typeface="メイリオ"/>
-                <a:ea typeface="メイリオ"/>
-                <a:cs typeface="メイリオ"/>
-              </a:rPr>
-              <a:t>申込み 100件</a:t>
-            </a:r>
-          </a:p>
-          <a:p>
-            <a:pPr algn="ctr">
-              <a:lnSpc>
-                <a:spcPct val="120000"/>
-              </a:lnSpc>
-            </a:pPr>
-            <a:r>
-              <a:rPr sz="1200" b="0">
-                <a:solidFill>
-                  <a:srgbClr val="1F285A"/>
-                </a:solidFill>
-                <a:latin typeface="メイリオ"/>
-                <a:ea typeface="メイリオ"/>
-                <a:cs typeface="メイリオ"/>
-              </a:rPr>
-              <a:t>広告費 月100万円</a:t>
-            </a:r>
-          </a:p>
-        </p:txBody>
-      </p:sp>
-      <p:sp>
-        <p:nvSpPr>
-          <p:cNvPr id="15" name="Right Arrow 14"/>
-          <p:cNvSpPr/>
-          <p:nvPr/>
-        </p:nvSpPr>
-        <p:spPr>
-          <a:xfrm>
-            <a:off x="4860000" y="3997800"/>
-            <a:ext cx="288000" cy="324000"/>
-          </a:xfrm>
-          <a:prstGeom prst="rightArrow">
-            <a:avLst/>
-          </a:prstGeom>
-          <a:solidFill>
-            <a:srgbClr val="06C755"/>
-          </a:solidFill>
-          <a:ln>
-            <a:noFill/>
-          </a:ln>
-          <a:effectLst/>
-        </p:spPr>
-        <p:style>
-          <a:lnRef idx="1">
-            <a:schemeClr val="accent1"/>
-          </a:lnRef>
-          <a:fillRef idx="3">
-            <a:schemeClr val="accent1"/>
-          </a:fillRef>
-          <a:effectRef idx="2">
-            <a:schemeClr val="accent1"/>
-          </a:effectRef>
-          <a:fontRef idx="minor">
-            <a:schemeClr val="lt1"/>
-          </a:fontRef>
-        </p:style>
-        <p:txBody>
-          <a:bodyPr rtlCol="0" anchor="ctr"/>
-          <a:lstStyle/>
-          <a:p>
-            <a:pPr algn="ctr"/>
-          </a:p>
-        </p:txBody>
-      </p:sp>
-      <p:sp>
-        <p:nvSpPr>
-          <p:cNvPr id="16" name="Rounded Rectangle 15"/>
-          <p:cNvSpPr/>
-          <p:nvPr/>
-        </p:nvSpPr>
-        <p:spPr>
-          <a:xfrm>
-            <a:off x="5220000" y="3727800"/>
-            <a:ext cx="1944000" cy="864000"/>
-          </a:xfrm>
-          <a:prstGeom prst="roundRect">
-            <a:avLst>
-              <a:gd name="adj" fmla="val 10000"/>
-            </a:avLst>
-          </a:prstGeom>
-          <a:solidFill>
-            <a:srgbClr val="E8F8EE"/>
-          </a:solidFill>
-          <a:ln w="19050">
-            <a:solidFill>
-              <a:srgbClr val="06C755"/>
-            </a:solidFill>
-          </a:ln>
-          <a:effectLst/>
-        </p:spPr>
-        <p:style>
-          <a:lnRef idx="1">
-            <a:schemeClr val="accent1"/>
-          </a:lnRef>
-          <a:fillRef idx="3">
-            <a:schemeClr val="accent1"/>
-          </a:fillRef>
-          <a:effectRef idx="2">
-            <a:schemeClr val="accent1"/>
-          </a:effectRef>
-          <a:fontRef idx="minor">
-            <a:schemeClr val="lt1"/>
-          </a:fontRef>
-        </p:style>
-        <p:txBody>
-          <a:bodyPr rtlCol="0" anchor="ctr" wrap="square" lIns="54000" rIns="54000" tIns="18000" bIns="18000"/>
-          <a:lstStyle/>
-          <a:p>
-            <a:pPr algn="ctr">
-              <a:lnSpc>
-                <a:spcPct val="120000"/>
-              </a:lnSpc>
-            </a:pPr>
-            <a:r>
-              <a:rPr sz="1300" b="1">
-                <a:solidFill>
-                  <a:srgbClr val="0B7A3B"/>
-                </a:solidFill>
-                <a:latin typeface="メイリオ"/>
-                <a:ea typeface="メイリオ"/>
-                <a:cs typeface="メイリオ"/>
-              </a:rPr>
-              <a:t>サンクスLINE</a:t>
-            </a:r>
-          </a:p>
-        </p:txBody>
-      </p:sp>
-      <p:sp>
-        <p:nvSpPr>
-          <p:cNvPr id="17" name="Right Arrow 16"/>
-          <p:cNvSpPr/>
-          <p:nvPr/>
-        </p:nvSpPr>
-        <p:spPr>
-          <a:xfrm>
-            <a:off x="7236000" y="3997800"/>
-            <a:ext cx="288000" cy="324000"/>
-          </a:xfrm>
-          <a:prstGeom prst="rightArrow">
-            <a:avLst/>
-          </a:prstGeom>
-          <a:solidFill>
-            <a:srgbClr val="06C755"/>
-          </a:solidFill>
-          <a:ln>
-            <a:noFill/>
-          </a:ln>
-          <a:effectLst/>
-        </p:spPr>
-        <p:style>
-          <a:lnRef idx="1">
-            <a:schemeClr val="accent1"/>
-          </a:lnRef>
-          <a:fillRef idx="3">
-            <a:schemeClr val="accent1"/>
-          </a:fillRef>
-          <a:effectRef idx="2">
-            <a:schemeClr val="accent1"/>
-          </a:effectRef>
-          <a:fontRef idx="minor">
-            <a:schemeClr val="lt1"/>
-          </a:fontRef>
-        </p:style>
-        <p:txBody>
-          <a:bodyPr rtlCol="0" anchor="ctr"/>
-          <a:lstStyle/>
-          <a:p>
-            <a:pPr algn="ctr"/>
-          </a:p>
-        </p:txBody>
-      </p:sp>
-      <p:sp>
-        <p:nvSpPr>
-          <p:cNvPr id="18" name="Rounded Rectangle 17"/>
-          <p:cNvSpPr/>
-          <p:nvPr/>
-        </p:nvSpPr>
-        <p:spPr>
-          <a:xfrm>
-            <a:off x="7596000" y="3727800"/>
-            <a:ext cx="1879200" cy="864000"/>
-          </a:xfrm>
-          <a:prstGeom prst="roundRect">
-            <a:avLst>
-              <a:gd name="adj" fmla="val 10000"/>
-            </a:avLst>
-          </a:prstGeom>
-          <a:solidFill>
-            <a:srgbClr val="06C755"/>
-          </a:solidFill>
-          <a:ln>
-            <a:noFill/>
-          </a:ln>
-          <a:effectLst/>
-        </p:spPr>
-        <p:style>
-          <a:lnRef idx="1">
-            <a:schemeClr val="accent1"/>
-          </a:lnRef>
-          <a:fillRef idx="3">
-            <a:schemeClr val="accent1"/>
-          </a:fillRef>
-          <a:effectRef idx="2">
-            <a:schemeClr val="accent1"/>
-          </a:effectRef>
-          <a:fontRef idx="minor">
-            <a:schemeClr val="lt1"/>
-          </a:fontRef>
-        </p:style>
-        <p:txBody>
-          <a:bodyPr rtlCol="0" anchor="ctr" wrap="square" lIns="54000" rIns="54000" tIns="18000" bIns="18000"/>
-          <a:lstStyle/>
-          <a:p>
-            <a:pPr algn="ctr">
-              <a:lnSpc>
-                <a:spcPct val="120000"/>
-              </a:lnSpc>
-            </a:pPr>
-            <a:r>
-              <a:rPr sz="1500" b="1">
-                <a:solidFill>
-                  <a:srgbClr val="FFFFFF"/>
-                </a:solidFill>
-                <a:latin typeface="メイリオ"/>
-                <a:ea typeface="メイリオ"/>
-                <a:cs typeface="メイリオ"/>
-              </a:rPr>
-              <a:t>成約 24件</a:t>
-            </a:r>
-          </a:p>
-          <a:p>
-            <a:pPr algn="ctr">
-              <a:lnSpc>
-                <a:spcPct val="120000"/>
-              </a:lnSpc>
-            </a:pPr>
-            <a:r>
-              <a:rPr sz="1300" b="0">
-                <a:solidFill>
-                  <a:srgbClr val="FFFFFF"/>
-                </a:solidFill>
-                <a:latin typeface="メイリオ"/>
-                <a:ea typeface="メイリオ"/>
-                <a:cs typeface="メイリオ"/>
-              </a:rPr>
-              <a:t>1件あたり 約4.3万円</a:t>
-            </a:r>
-          </a:p>
-        </p:txBody>
-      </p:sp>
-      <p:sp>
-        <p:nvSpPr>
-          <p:cNvPr id="19" name="Rounded Rectangle 18"/>
-          <p:cNvSpPr/>
-          <p:nvPr/>
-        </p:nvSpPr>
-        <p:spPr>
-          <a:xfrm>
-            <a:off x="432000" y="4879800"/>
-            <a:ext cx="9043200" cy="503999"/>
-          </a:xfrm>
-          <a:prstGeom prst="roundRect">
-            <a:avLst>
-              <a:gd name="adj" fmla="val 10000"/>
-            </a:avLst>
-          </a:prstGeom>
-          <a:solidFill>
-            <a:srgbClr val="1F285A"/>
-          </a:solidFill>
-          <a:ln>
-            <a:noFill/>
-          </a:ln>
-          <a:effectLst/>
-        </p:spPr>
-        <p:style>
-          <a:lnRef idx="1">
-            <a:schemeClr val="accent1"/>
-          </a:lnRef>
-          <a:fillRef idx="3">
-            <a:schemeClr val="accent1"/>
-          </a:fillRef>
-          <a:effectRef idx="2">
-            <a:schemeClr val="accent1"/>
-          </a:effectRef>
-          <a:fontRef idx="minor">
-            <a:schemeClr val="lt1"/>
-          </a:fontRef>
-        </p:style>
-        <p:txBody>
-          <a:bodyPr rtlCol="0" anchor="ctr" wrap="square" lIns="108000" rIns="108000" tIns="0" bIns="0"/>
-          <a:lstStyle/>
-          <a:p>
-            <a:pPr algn="ctr">
-              <a:lnSpc>
-                <a:spcPct val="125000"/>
-              </a:lnSpc>
-            </a:pPr>
-            <a:r>
-              <a:rPr sz="1400" b="1">
-                <a:solidFill>
-                  <a:srgbClr val="FFFFFF"/>
-                </a:solidFill>
-                <a:latin typeface="メイリオ"/>
-                <a:ea typeface="メイリオ"/>
-                <a:cs typeface="メイリオ"/>
-              </a:rPr>
-              <a:t>LINEの友だちは毎月たまり、広告を止めても案内を続けられます</a:t>
-            </a:r>
-          </a:p>
-        </p:txBody>
-      </p:sp>
-      <p:sp>
-        <p:nvSpPr>
-          <p:cNvPr id="20" name="TextBox 19"/>
-          <p:cNvSpPr txBox="1"/>
-          <p:nvPr/>
-        </p:nvSpPr>
-        <p:spPr>
-          <a:xfrm>
-            <a:off x="432000" y="6246000"/>
-            <a:ext cx="9043200" cy="324000"/>
-          </a:xfrm>
-          <a:prstGeom prst="rect">
-            <a:avLst/>
-          </a:prstGeom>
-          <a:noFill/>
-        </p:spPr>
-        <p:txBody>
-          <a:bodyPr wrap="square" lIns="0" rIns="0" tIns="21600" bIns="21600" anchor="t">
-            <a:spAutoFit/>
-          </a:bodyPr>
-          <a:lstStyle/>
-          <a:p>
-            <a:pPr algn="l">
-              <a:lnSpc>
-                <a:spcPct val="115000"/>
-              </a:lnSpc>
-            </a:pPr>
-            <a:r>
-              <a:rPr sz="750">
-                <a:solidFill>
-                  <a:srgbClr val="7F7F7F"/>
-                </a:solidFill>
-                <a:latin typeface="メイリオ"/>
-                <a:ea typeface="メイリオ"/>
-                <a:cs typeface="メイリオ"/>
-              </a:rPr>
-              <a:t>※試算例：成約率 20%（広告だけ）→ 24%（広告＋LINE）。1件あたり＝（広告費＋LINE費用 月3万円）÷成約件数</a:t>
-            </a:r>
-          </a:p>
-        </p:txBody>
-      </p:sp>
-    </p:spTree>
-  </p:cSld>
-  <p:clrMapOvr>
-    <a:masterClrMapping/>
-  </p:clrMapOvr>
-</p:sld>
-</file>
-
-<file path=ppt/slides/slide6.xml><?xml version="1.0" encoding="utf-8"?>
 <p:sld xmlns:a="http://schemas.openxmlformats.org/drawingml/2006/main" xmlns:r="http://schemas.openxmlformats.org/officeDocument/2006/relationships" xmlns:p="http://schemas.openxmlformats.org/presentationml/2006/main">
   <p:cSld>
     <p:spTree>
@@ -6933,7 +7356,7 @@
           <a:noFill/>
         </p:spPr>
         <p:txBody>
-          <a:bodyPr wrap="square" lIns="0" rIns="0" tIns="21600" bIns="21600" anchor="ctr">
+          <a:bodyPr wrap="square" lIns="0" tIns="21600" rIns="0" bIns="21600" anchor="ctr">
             <a:spAutoFit/>
           </a:bodyPr>
           <a:lstStyle/>
@@ -6970,7 +7393,7 @@
           <a:noFill/>
         </p:spPr>
         <p:txBody>
-          <a:bodyPr wrap="square" lIns="0" rIns="0" tIns="21600" bIns="21600" anchor="ctr">
+          <a:bodyPr wrap="square" lIns="0" tIns="21600" rIns="0" bIns="21600" anchor="ctr">
             <a:spAutoFit/>
           </a:bodyPr>
           <a:lstStyle/>
@@ -6981,7 +7404,7 @@
               </a:lnSpc>
             </a:pPr>
             <a:r>
-              <a:rPr sz="1250">
+              <a:rPr sz="1250" dirty="0" err="1">
                 <a:solidFill>
                   <a:srgbClr val="333333"/>
                 </a:solidFill>
@@ -6989,7 +7412,18 @@
                 <a:ea typeface="メイリオ"/>
                 <a:cs typeface="メイリオ"/>
               </a:rPr>
-              <a:t>大きな開発は不要です。広告の予算の一部から、小さく始められます。</a:t>
+              <a:t>大きな開発は不要です。広告の予算の一部から、小さく始められます</a:t>
+            </a:r>
+            <a:r>
+              <a:rPr sz="1250" dirty="0">
+                <a:solidFill>
+                  <a:srgbClr val="333333"/>
+                </a:solidFill>
+                <a:latin typeface="メイリオ"/>
+                <a:ea typeface="メイリオ"/>
+                <a:cs typeface="メイリオ"/>
+              </a:rPr>
+              <a:t>。</a:t>
             </a:r>
           </a:p>
         </p:txBody>
@@ -7068,7 +7502,7 @@
           </a:fontRef>
         </p:style>
         <p:txBody>
-          <a:bodyPr rtlCol="0" anchor="ctr" wrap="square" lIns="54000" rIns="54000" tIns="18000" bIns="18000"/>
+          <a:bodyPr wrap="square" lIns="54000" tIns="18000" rIns="54000" bIns="18000" rtlCol="0" anchor="ctr"/>
           <a:lstStyle/>
           <a:p>
             <a:pPr algn="ctr">
@@ -7129,7 +7563,7 @@
           </a:fontRef>
         </p:style>
         <p:txBody>
-          <a:bodyPr rtlCol="0" anchor="ctr" wrap="square" lIns="125999" rIns="108000" tIns="90000" bIns="54000"/>
+          <a:bodyPr wrap="square" lIns="125999" tIns="90000" rIns="108000" bIns="54000" rtlCol="0" anchor="ctr"/>
           <a:lstStyle/>
           <a:p>
             <a:pPr algn="l">
@@ -7211,7 +7645,7 @@
           </a:fontRef>
         </p:style>
         <p:txBody>
-          <a:bodyPr rtlCol="0" anchor="ctr" wrap="square" lIns="54000" rIns="54000" tIns="18000" bIns="18000"/>
+          <a:bodyPr wrap="square" lIns="54000" tIns="18000" rIns="54000" bIns="18000" rtlCol="0" anchor="ctr"/>
           <a:lstStyle/>
           <a:p>
             <a:pPr algn="ctr">
@@ -7272,7 +7706,7 @@
           </a:fontRef>
         </p:style>
         <p:txBody>
-          <a:bodyPr rtlCol="0" anchor="ctr" wrap="square" lIns="125999" rIns="108000" tIns="90000" bIns="54000"/>
+          <a:bodyPr wrap="square" lIns="125999" tIns="90000" rIns="108000" bIns="54000" rtlCol="0" anchor="ctr"/>
           <a:lstStyle/>
           <a:p>
             <a:pPr algn="l">
@@ -7354,7 +7788,7 @@
           </a:fontRef>
         </p:style>
         <p:txBody>
-          <a:bodyPr rtlCol="0" anchor="ctr" wrap="square" lIns="36000" rIns="36000" tIns="0" bIns="0"/>
+          <a:bodyPr wrap="square" lIns="36000" tIns="0" rIns="36000" bIns="0" rtlCol="0" anchor="ctr"/>
           <a:lstStyle/>
           <a:p>
             <a:pPr algn="ctr"/>
@@ -7411,7 +7845,7 @@
           </a:fontRef>
         </p:style>
         <p:txBody>
-          <a:bodyPr rtlCol="0" anchor="ctr" wrap="square" lIns="36000" rIns="36000" tIns="0" bIns="0"/>
+          <a:bodyPr wrap="square" lIns="36000" tIns="0" rIns="36000" bIns="0" rtlCol="0" anchor="ctr"/>
           <a:lstStyle/>
           <a:p>
             <a:pPr algn="ctr"/>
@@ -7446,7 +7880,7 @@
           <a:noFill/>
         </p:spPr>
         <p:txBody>
-          <a:bodyPr wrap="square" lIns="0" rIns="50400" tIns="21600" bIns="21600" anchor="ctr">
+          <a:bodyPr wrap="square" lIns="0" tIns="21600" rIns="50400" bIns="21600" anchor="ctr">
             <a:spAutoFit/>
           </a:bodyPr>
           <a:lstStyle/>
@@ -7505,7 +7939,7 @@
           </a:fontRef>
         </p:style>
         <p:txBody>
-          <a:bodyPr rtlCol="0" anchor="ctr" wrap="square" lIns="108000" rIns="108000" tIns="0" bIns="0"/>
+          <a:bodyPr wrap="square" lIns="108000" tIns="0" rIns="108000" bIns="0" rtlCol="0" anchor="ctr"/>
           <a:lstStyle/>
           <a:p>
             <a:pPr algn="ctr">
@@ -7514,7 +7948,7 @@
               </a:lnSpc>
             </a:pPr>
             <a:r>
-              <a:rPr sz="1400" b="1">
+              <a:rPr sz="1400" b="1" dirty="0" err="1">
                 <a:solidFill>
                   <a:srgbClr val="FFFFFF"/>
                 </a:solidFill>
@@ -7522,8 +7956,60 @@
                 <a:ea typeface="メイリオ"/>
                 <a:cs typeface="メイリオ"/>
               </a:rPr>
-              <a:t>まずは、広告のご提案とあわせて、LINEの設計をご提案します</a:t>
-            </a:r>
+              <a:t>まずは、広告のご提案とあわせて、LINE</a:t>
+            </a:r>
+            <a:r>
+              <a:rPr lang="ja-JP" altLang="en-US" sz="1400" b="1" dirty="0">
+                <a:solidFill>
+                  <a:srgbClr val="FFFFFF"/>
+                </a:solidFill>
+                <a:latin typeface="メイリオ"/>
+                <a:ea typeface="メイリオ"/>
+                <a:cs typeface="メイリオ"/>
+              </a:rPr>
+              <a:t>へ</a:t>
+            </a:r>
+            <a:r>
+              <a:rPr sz="1400" b="1" dirty="0">
+                <a:solidFill>
+                  <a:srgbClr val="FFFFFF"/>
+                </a:solidFill>
+                <a:latin typeface="メイリオ"/>
+                <a:ea typeface="メイリオ"/>
+                <a:cs typeface="メイリオ"/>
+              </a:rPr>
+              <a:t>の</a:t>
+            </a:r>
+            <a:r>
+              <a:rPr lang="ja-JP" altLang="en-US" sz="1400" b="1" dirty="0">
+                <a:solidFill>
+                  <a:srgbClr val="FFFFFF"/>
+                </a:solidFill>
+                <a:latin typeface="メイリオ"/>
+                <a:ea typeface="メイリオ"/>
+                <a:cs typeface="メイリオ"/>
+              </a:rPr>
+              <a:t>導線</a:t>
+            </a:r>
+            <a:r>
+              <a:rPr sz="1400" b="1" dirty="0" err="1">
+                <a:solidFill>
+                  <a:srgbClr val="FFFFFF"/>
+                </a:solidFill>
+                <a:latin typeface="メイリオ"/>
+                <a:ea typeface="メイリオ"/>
+                <a:cs typeface="メイリオ"/>
+              </a:rPr>
+              <a:t>設計をご提案します</a:t>
+            </a:r>
+            <a:endParaRPr sz="1400" b="1" dirty="0">
+              <a:solidFill>
+                <a:srgbClr val="FFFFFF"/>
+              </a:solidFill>
+              <a:latin typeface="メイリオ"/>
+              <a:ea typeface="メイリオ"/>
+              <a:cs typeface="メイリオ"/>
+            </a:endParaRPr>
           </a:p>
         </p:txBody>
       </p:sp>
